--- a/03-课件PPT/讲次版/第3章-4-讲次 3-4 · Sandbox 与执行边界.pptx
+++ b/03-课件PPT/讲次版/第3章-4-讲次 3-4 · Sandbox 与执行边界.pptx
@@ -3887,14 +3887,400 @@
       </p:sp>
       <p:sp>
         <p:nvSpPr>
-          <p:cNvPr id="5" name="TextBox 4"/>
+          <p:cNvPr id="5" name="Rounded Rectangle 4"/>
+          <p:cNvSpPr/>
+          <p:nvPr/>
+        </p:nvSpPr>
+        <p:spPr>
+          <a:xfrm>
+            <a:off x="1333500" y="1047750"/>
+            <a:ext cx="9525000" cy="2952750"/>
+          </a:xfrm>
+          <a:prstGeom prst="roundRect">
+            <a:avLst>
+              <a:gd name="adj" fmla="val 8000"/>
+            </a:avLst>
+          </a:prstGeom>
+          <a:solidFill>
+            <a:srgbClr val="0D1117"/>
+          </a:solidFill>
+          <a:ln>
+            <a:noFill/>
+          </a:ln>
+          <a:effectLst/>
+        </p:spPr>
+        <p:style>
+          <a:lnRef idx="1">
+            <a:schemeClr val="accent1"/>
+          </a:lnRef>
+          <a:fillRef idx="3">
+            <a:schemeClr val="accent1"/>
+          </a:fillRef>
+          <a:effectRef idx="2">
+            <a:schemeClr val="accent1"/>
+          </a:effectRef>
+          <a:fontRef idx="minor">
+            <a:schemeClr val="lt1"/>
+          </a:fontRef>
+        </p:style>
+        <p:txBody>
+          <a:bodyPr rtlCol="0" anchor="ctr"/>
+          <a:lstStyle/>
+          <a:p>
+            <a:pPr algn="ctr"/>
+          </a:p>
+        </p:txBody>
+      </p:sp>
+      <p:sp>
+        <p:nvSpPr>
+          <p:cNvPr id="6" name="Rectangle 5"/>
+          <p:cNvSpPr/>
+          <p:nvPr/>
+        </p:nvSpPr>
+        <p:spPr>
+          <a:xfrm>
+            <a:off x="1333500" y="1047750"/>
+            <a:ext cx="9525000" cy="381000"/>
+          </a:xfrm>
+          <a:prstGeom prst="rect">
+            <a:avLst/>
+          </a:prstGeom>
+          <a:solidFill>
+            <a:srgbClr val="1F2937"/>
+          </a:solidFill>
+          <a:ln>
+            <a:noFill/>
+          </a:ln>
+          <a:effectLst/>
+        </p:spPr>
+        <p:style>
+          <a:lnRef idx="1">
+            <a:schemeClr val="accent1"/>
+          </a:lnRef>
+          <a:fillRef idx="3">
+            <a:schemeClr val="accent1"/>
+          </a:fillRef>
+          <a:effectRef idx="2">
+            <a:schemeClr val="accent1"/>
+          </a:effectRef>
+          <a:fontRef idx="minor">
+            <a:schemeClr val="lt1"/>
+          </a:fontRef>
+        </p:style>
+        <p:txBody>
+          <a:bodyPr rtlCol="0" anchor="ctr"/>
+          <a:lstStyle/>
+          <a:p>
+            <a:pPr algn="ctr"/>
+          </a:p>
+        </p:txBody>
+      </p:sp>
+      <p:sp>
+        <p:nvSpPr>
+          <p:cNvPr id="7" name="Rounded Rectangle 6"/>
+          <p:cNvSpPr/>
+          <p:nvPr/>
+        </p:nvSpPr>
+        <p:spPr>
+          <a:xfrm>
+            <a:off x="1504950" y="1181100"/>
+            <a:ext cx="123825" cy="123825"/>
+          </a:xfrm>
+          <a:prstGeom prst="roundRect">
+            <a:avLst>
+              <a:gd name="adj" fmla="val 8000"/>
+            </a:avLst>
+          </a:prstGeom>
+          <a:solidFill>
+            <a:srgbClr val="F87171"/>
+          </a:solidFill>
+          <a:ln>
+            <a:noFill/>
+          </a:ln>
+          <a:effectLst/>
+        </p:spPr>
+        <p:style>
+          <a:lnRef idx="1">
+            <a:schemeClr val="accent1"/>
+          </a:lnRef>
+          <a:fillRef idx="3">
+            <a:schemeClr val="accent1"/>
+          </a:fillRef>
+          <a:effectRef idx="2">
+            <a:schemeClr val="accent1"/>
+          </a:effectRef>
+          <a:fontRef idx="minor">
+            <a:schemeClr val="lt1"/>
+          </a:fontRef>
+        </p:style>
+        <p:txBody>
+          <a:bodyPr rtlCol="0" anchor="ctr"/>
+          <a:lstStyle/>
+          <a:p>
+            <a:pPr algn="ctr"/>
+          </a:p>
+        </p:txBody>
+      </p:sp>
+      <p:sp>
+        <p:nvSpPr>
+          <p:cNvPr id="8" name="Rounded Rectangle 7"/>
+          <p:cNvSpPr/>
+          <p:nvPr/>
+        </p:nvSpPr>
+        <p:spPr>
+          <a:xfrm>
+            <a:off x="1752600" y="1181100"/>
+            <a:ext cx="123825" cy="123825"/>
+          </a:xfrm>
+          <a:prstGeom prst="roundRect">
+            <a:avLst>
+              <a:gd name="adj" fmla="val 8000"/>
+            </a:avLst>
+          </a:prstGeom>
+          <a:solidFill>
+            <a:srgbClr val="F59E0B"/>
+          </a:solidFill>
+          <a:ln>
+            <a:noFill/>
+          </a:ln>
+          <a:effectLst/>
+        </p:spPr>
+        <p:style>
+          <a:lnRef idx="1">
+            <a:schemeClr val="accent1"/>
+          </a:lnRef>
+          <a:fillRef idx="3">
+            <a:schemeClr val="accent1"/>
+          </a:fillRef>
+          <a:effectRef idx="2">
+            <a:schemeClr val="accent1"/>
+          </a:effectRef>
+          <a:fontRef idx="minor">
+            <a:schemeClr val="lt1"/>
+          </a:fontRef>
+        </p:style>
+        <p:txBody>
+          <a:bodyPr rtlCol="0" anchor="ctr"/>
+          <a:lstStyle/>
+          <a:p>
+            <a:pPr algn="ctr"/>
+          </a:p>
+        </p:txBody>
+      </p:sp>
+      <p:sp>
+        <p:nvSpPr>
+          <p:cNvPr id="9" name="Rounded Rectangle 8"/>
+          <p:cNvSpPr/>
+          <p:nvPr/>
+        </p:nvSpPr>
+        <p:spPr>
+          <a:xfrm>
+            <a:off x="2000250" y="1181100"/>
+            <a:ext cx="123825" cy="123825"/>
+          </a:xfrm>
+          <a:prstGeom prst="roundRect">
+            <a:avLst>
+              <a:gd name="adj" fmla="val 8000"/>
+            </a:avLst>
+          </a:prstGeom>
+          <a:solidFill>
+            <a:srgbClr val="34D399"/>
+          </a:solidFill>
+          <a:ln>
+            <a:noFill/>
+          </a:ln>
+          <a:effectLst/>
+        </p:spPr>
+        <p:style>
+          <a:lnRef idx="1">
+            <a:schemeClr val="accent1"/>
+          </a:lnRef>
+          <a:fillRef idx="3">
+            <a:schemeClr val="accent1"/>
+          </a:fillRef>
+          <a:effectRef idx="2">
+            <a:schemeClr val="accent1"/>
+          </a:effectRef>
+          <a:fontRef idx="minor">
+            <a:schemeClr val="lt1"/>
+          </a:fontRef>
+        </p:style>
+        <p:txBody>
+          <a:bodyPr rtlCol="0" anchor="ctr"/>
+          <a:lstStyle/>
+          <a:p>
+            <a:pPr algn="ctr"/>
+          </a:p>
+        </p:txBody>
+      </p:sp>
+      <p:sp>
+        <p:nvSpPr>
+          <p:cNvPr id="10" name="TextBox 9"/>
           <p:cNvSpPr txBox="1"/>
           <p:nvPr/>
         </p:nvSpPr>
         <p:spPr>
           <a:xfrm>
-            <a:off x="9334500" y="0"/>
-            <a:ext cx="2667000" cy="704850"/>
+            <a:off x="2381250" y="1047750"/>
+            <a:ext cx="8286750" cy="381000"/>
+          </a:xfrm>
+          <a:prstGeom prst="rect">
+            <a:avLst/>
+          </a:prstGeom>
+          <a:noFill/>
+        </p:spPr>
+        <p:txBody>
+          <a:bodyPr wrap="square" anchor="ctr">
+            <a:spAutoFit/>
+          </a:bodyPr>
+          <a:lstStyle/>
+          <a:p>
+            <a:pPr algn="l">
+              <a:lnSpc>
+                <a:spcPct val="100000"/>
+              </a:lnSpc>
+            </a:pPr>
+            <a:r>
+              <a:rPr sz="1100" b="0">
+                <a:solidFill>
+                  <a:srgbClr val="94A3B8"/>
+                </a:solidFill>
+                <a:latin typeface="PingFang SC"/>
+              </a:rPr>
+              <a:t>terminal — 平台实测</a:t>
+            </a:r>
+          </a:p>
+        </p:txBody>
+      </p:sp>
+      <p:sp>
+        <p:nvSpPr>
+          <p:cNvPr id="11" name="TextBox 10"/>
+          <p:cNvSpPr txBox="1"/>
+          <p:nvPr/>
+        </p:nvSpPr>
+        <p:spPr>
+          <a:xfrm>
+            <a:off x="1562100" y="1581150"/>
+            <a:ext cx="9067800" cy="2286000"/>
+          </a:xfrm>
+          <a:prstGeom prst="rect">
+            <a:avLst/>
+          </a:prstGeom>
+          <a:noFill/>
+        </p:spPr>
+        <p:txBody>
+          <a:bodyPr wrap="square">
+            <a:spAutoFit/>
+          </a:bodyPr>
+          <a:lstStyle/>
+          <a:p>
+            <a:pPr>
+              <a:lnSpc>
+                <a:spcPct val="115000"/>
+              </a:lnSpc>
+            </a:pPr>
+            <a:r>
+              <a:rPr sz="1300" b="1">
+                <a:solidFill>
+                  <a:srgbClr val="34D399"/>
+                </a:solidFill>
+                <a:latin typeface="Menlo"/>
+              </a:rPr>
+              <a:t>$ sandbox.check_command("rm -rf --no-preserve-root /")</a:t>
+            </a:r>
+          </a:p>
+          <a:p>
+            <a:pPr>
+              <a:lnSpc>
+                <a:spcPct val="115000"/>
+              </a:lnSpc>
+            </a:pPr>
+            <a:r>
+              <a:rPr sz="1300">
+                <a:solidFill>
+                  <a:srgbClr val="CBD5E1"/>
+                </a:solidFill>
+                <a:latin typeface="Menlo"/>
+              </a:rPr>
+              <a:t>SandboxViolation: dangerous pattern blocked</a:t>
+            </a:r>
+          </a:p>
+          <a:p>
+            <a:pPr>
+              <a:lnSpc>
+                <a:spcPct val="115000"/>
+              </a:lnSpc>
+            </a:pPr>
+            <a:r>
+              <a:rPr sz="1300" b="1">
+                <a:solidFill>
+                  <a:srgbClr val="34D399"/>
+                </a:solidFill>
+                <a:latin typeface="Menlo"/>
+              </a:rPr>
+              <a:t>$ sandbox.check_command("ls -la")  # 白名单内</a:t>
+            </a:r>
+          </a:p>
+          <a:p>
+            <a:pPr>
+              <a:lnSpc>
+                <a:spcPct val="115000"/>
+              </a:lnSpc>
+            </a:pPr>
+            <a:r>
+              <a:rPr sz="1300">
+                <a:solidFill>
+                  <a:srgbClr val="CBD5E1"/>
+                </a:solidFill>
+                <a:latin typeface="Menlo"/>
+              </a:rPr>
+              <a:t>True</a:t>
+            </a:r>
+          </a:p>
+          <a:p>
+            <a:pPr>
+              <a:lnSpc>
+                <a:spcPct val="115000"/>
+              </a:lnSpc>
+            </a:pPr>
+            <a:r>
+              <a:rPr sz="1300" b="1">
+                <a:solidFill>
+                  <a:srgbClr val="34D399"/>
+                </a:solidFill>
+                <a:latin typeface="Menlo"/>
+              </a:rPr>
+              <a:t>$ sandbox.check_read("/etc/passwd")  # roots 外</a:t>
+            </a:r>
+          </a:p>
+          <a:p>
+            <a:pPr>
+              <a:lnSpc>
+                <a:spcPct val="115000"/>
+              </a:lnSpc>
+            </a:pPr>
+            <a:r>
+              <a:rPr sz="1300">
+                <a:solidFill>
+                  <a:srgbClr val="CBD5E1"/>
+                </a:solidFill>
+                <a:latin typeface="Menlo"/>
+              </a:rPr>
+              <a:t>SandboxViolation: read denied outside roots</a:t>
+            </a:r>
+          </a:p>
+        </p:txBody>
+      </p:sp>
+      <p:sp>
+        <p:nvSpPr>
+          <p:cNvPr id="12" name="TextBox 11"/>
+          <p:cNvSpPr txBox="1"/>
+          <p:nvPr/>
+        </p:nvSpPr>
+        <p:spPr>
+          <a:xfrm>
+            <a:off x="10287000" y="6534150"/>
+            <a:ext cx="1619250" cy="266700"/>
           </a:xfrm>
           <a:prstGeom prst="rect">
             <a:avLst/>
@@ -3913,431 +4299,6 @@
               </a:lnSpc>
             </a:pPr>
             <a:r>
-              <a:rPr sz="1100" b="0">
-                <a:solidFill>
-                  <a:srgbClr val="94A3B8"/>
-                </a:solidFill>
-                <a:latin typeface="PingFang SC"/>
-              </a:rPr>
-              <a:t>$ sandbox.check_command("rm -rf --no-preserve-root /");SandboxViolation: dangerous pattern blocked;$ sandbox.check_command("ls -la")  # 白名单内;True;$ sandbox.check_read("/etc/passwd")  # roots 外;SandboxViolation: read denied outside roots|默认拒绝:白名单外一律拦截</a:t>
-            </a:r>
-          </a:p>
-        </p:txBody>
-      </p:sp>
-      <p:sp>
-        <p:nvSpPr>
-          <p:cNvPr id="6" name="Rounded Rectangle 5"/>
-          <p:cNvSpPr/>
-          <p:nvPr/>
-        </p:nvSpPr>
-        <p:spPr>
-          <a:xfrm>
-            <a:off x="1333500" y="952500"/>
-            <a:ext cx="9525000" cy="5048250"/>
-          </a:xfrm>
-          <a:prstGeom prst="roundRect">
-            <a:avLst>
-              <a:gd name="adj" fmla="val 8000"/>
-            </a:avLst>
-          </a:prstGeom>
-          <a:solidFill>
-            <a:srgbClr val="0D1117"/>
-          </a:solidFill>
-          <a:ln>
-            <a:noFill/>
-          </a:ln>
-          <a:effectLst/>
-        </p:spPr>
-        <p:style>
-          <a:lnRef idx="1">
-            <a:schemeClr val="accent1"/>
-          </a:lnRef>
-          <a:fillRef idx="3">
-            <a:schemeClr val="accent1"/>
-          </a:fillRef>
-          <a:effectRef idx="2">
-            <a:schemeClr val="accent1"/>
-          </a:effectRef>
-          <a:fontRef idx="minor">
-            <a:schemeClr val="lt1"/>
-          </a:fontRef>
-        </p:style>
-        <p:txBody>
-          <a:bodyPr rtlCol="0" anchor="ctr"/>
-          <a:lstStyle/>
-          <a:p>
-            <a:pPr algn="ctr"/>
-          </a:p>
-        </p:txBody>
-      </p:sp>
-      <p:sp>
-        <p:nvSpPr>
-          <p:cNvPr id="7" name="Rectangle 6"/>
-          <p:cNvSpPr/>
-          <p:nvPr/>
-        </p:nvSpPr>
-        <p:spPr>
-          <a:xfrm>
-            <a:off x="1333500" y="952500"/>
-            <a:ext cx="9525000" cy="381000"/>
-          </a:xfrm>
-          <a:prstGeom prst="rect">
-            <a:avLst/>
-          </a:prstGeom>
-          <a:solidFill>
-            <a:srgbClr val="1F2937"/>
-          </a:solidFill>
-          <a:ln>
-            <a:noFill/>
-          </a:ln>
-          <a:effectLst/>
-        </p:spPr>
-        <p:style>
-          <a:lnRef idx="1">
-            <a:schemeClr val="accent1"/>
-          </a:lnRef>
-          <a:fillRef idx="3">
-            <a:schemeClr val="accent1"/>
-          </a:fillRef>
-          <a:effectRef idx="2">
-            <a:schemeClr val="accent1"/>
-          </a:effectRef>
-          <a:fontRef idx="minor">
-            <a:schemeClr val="lt1"/>
-          </a:fontRef>
-        </p:style>
-        <p:txBody>
-          <a:bodyPr rtlCol="0" anchor="ctr"/>
-          <a:lstStyle/>
-          <a:p>
-            <a:pPr algn="ctr"/>
-          </a:p>
-        </p:txBody>
-      </p:sp>
-      <p:sp>
-        <p:nvSpPr>
-          <p:cNvPr id="8" name="Rounded Rectangle 7"/>
-          <p:cNvSpPr/>
-          <p:nvPr/>
-        </p:nvSpPr>
-        <p:spPr>
-          <a:xfrm>
-            <a:off x="1504950" y="1085850"/>
-            <a:ext cx="123825" cy="123825"/>
-          </a:xfrm>
-          <a:prstGeom prst="roundRect">
-            <a:avLst>
-              <a:gd name="adj" fmla="val 8000"/>
-            </a:avLst>
-          </a:prstGeom>
-          <a:solidFill>
-            <a:srgbClr val="F87171"/>
-          </a:solidFill>
-          <a:ln>
-            <a:noFill/>
-          </a:ln>
-          <a:effectLst/>
-        </p:spPr>
-        <p:style>
-          <a:lnRef idx="1">
-            <a:schemeClr val="accent1"/>
-          </a:lnRef>
-          <a:fillRef idx="3">
-            <a:schemeClr val="accent1"/>
-          </a:fillRef>
-          <a:effectRef idx="2">
-            <a:schemeClr val="accent1"/>
-          </a:effectRef>
-          <a:fontRef idx="minor">
-            <a:schemeClr val="lt1"/>
-          </a:fontRef>
-        </p:style>
-        <p:txBody>
-          <a:bodyPr rtlCol="0" anchor="ctr"/>
-          <a:lstStyle/>
-          <a:p>
-            <a:pPr algn="ctr"/>
-          </a:p>
-        </p:txBody>
-      </p:sp>
-      <p:sp>
-        <p:nvSpPr>
-          <p:cNvPr id="9" name="Rounded Rectangle 8"/>
-          <p:cNvSpPr/>
-          <p:nvPr/>
-        </p:nvSpPr>
-        <p:spPr>
-          <a:xfrm>
-            <a:off x="1752600" y="1085850"/>
-            <a:ext cx="123825" cy="123825"/>
-          </a:xfrm>
-          <a:prstGeom prst="roundRect">
-            <a:avLst>
-              <a:gd name="adj" fmla="val 8000"/>
-            </a:avLst>
-          </a:prstGeom>
-          <a:solidFill>
-            <a:srgbClr val="F59E0B"/>
-          </a:solidFill>
-          <a:ln>
-            <a:noFill/>
-          </a:ln>
-          <a:effectLst/>
-        </p:spPr>
-        <p:style>
-          <a:lnRef idx="1">
-            <a:schemeClr val="accent1"/>
-          </a:lnRef>
-          <a:fillRef idx="3">
-            <a:schemeClr val="accent1"/>
-          </a:fillRef>
-          <a:effectRef idx="2">
-            <a:schemeClr val="accent1"/>
-          </a:effectRef>
-          <a:fontRef idx="minor">
-            <a:schemeClr val="lt1"/>
-          </a:fontRef>
-        </p:style>
-        <p:txBody>
-          <a:bodyPr rtlCol="0" anchor="ctr"/>
-          <a:lstStyle/>
-          <a:p>
-            <a:pPr algn="ctr"/>
-          </a:p>
-        </p:txBody>
-      </p:sp>
-      <p:sp>
-        <p:nvSpPr>
-          <p:cNvPr id="10" name="Rounded Rectangle 9"/>
-          <p:cNvSpPr/>
-          <p:nvPr/>
-        </p:nvSpPr>
-        <p:spPr>
-          <a:xfrm>
-            <a:off x="2000250" y="1085850"/>
-            <a:ext cx="123825" cy="123825"/>
-          </a:xfrm>
-          <a:prstGeom prst="roundRect">
-            <a:avLst>
-              <a:gd name="adj" fmla="val 8000"/>
-            </a:avLst>
-          </a:prstGeom>
-          <a:solidFill>
-            <a:srgbClr val="34D399"/>
-          </a:solidFill>
-          <a:ln>
-            <a:noFill/>
-          </a:ln>
-          <a:effectLst/>
-        </p:spPr>
-        <p:style>
-          <a:lnRef idx="1">
-            <a:schemeClr val="accent1"/>
-          </a:lnRef>
-          <a:fillRef idx="3">
-            <a:schemeClr val="accent1"/>
-          </a:fillRef>
-          <a:effectRef idx="2">
-            <a:schemeClr val="accent1"/>
-          </a:effectRef>
-          <a:fontRef idx="minor">
-            <a:schemeClr val="lt1"/>
-          </a:fontRef>
-        </p:style>
-        <p:txBody>
-          <a:bodyPr rtlCol="0" anchor="ctr"/>
-          <a:lstStyle/>
-          <a:p>
-            <a:pPr algn="ctr"/>
-          </a:p>
-        </p:txBody>
-      </p:sp>
-      <p:sp>
-        <p:nvSpPr>
-          <p:cNvPr id="11" name="TextBox 10"/>
-          <p:cNvSpPr txBox="1"/>
-          <p:nvPr/>
-        </p:nvSpPr>
-        <p:spPr>
-          <a:xfrm>
-            <a:off x="2381250" y="952500"/>
-            <a:ext cx="8286750" cy="381000"/>
-          </a:xfrm>
-          <a:prstGeom prst="rect">
-            <a:avLst/>
-          </a:prstGeom>
-          <a:noFill/>
-        </p:spPr>
-        <p:txBody>
-          <a:bodyPr wrap="square" anchor="ctr">
-            <a:spAutoFit/>
-          </a:bodyPr>
-          <a:lstStyle/>
-          <a:p>
-            <a:pPr algn="l">
-              <a:lnSpc>
-                <a:spcPct val="100000"/>
-              </a:lnSpc>
-            </a:pPr>
-            <a:r>
-              <a:rPr sz="1100" b="0">
-                <a:solidFill>
-                  <a:srgbClr val="94A3B8"/>
-                </a:solidFill>
-                <a:latin typeface="PingFang SC"/>
-              </a:rPr>
-              <a:t>terminal — 平台实测</a:t>
-            </a:r>
-          </a:p>
-        </p:txBody>
-      </p:sp>
-      <p:sp>
-        <p:nvSpPr>
-          <p:cNvPr id="12" name="TextBox 11"/>
-          <p:cNvSpPr txBox="1"/>
-          <p:nvPr/>
-        </p:nvSpPr>
-        <p:spPr>
-          <a:xfrm>
-            <a:off x="1562100" y="1485900"/>
-            <a:ext cx="9067800" cy="4381500"/>
-          </a:xfrm>
-          <a:prstGeom prst="rect">
-            <a:avLst/>
-          </a:prstGeom>
-          <a:noFill/>
-        </p:spPr>
-        <p:txBody>
-          <a:bodyPr wrap="square">
-            <a:spAutoFit/>
-          </a:bodyPr>
-          <a:lstStyle/>
-          <a:p>
-            <a:pPr>
-              <a:lnSpc>
-                <a:spcPct val="115000"/>
-              </a:lnSpc>
-            </a:pPr>
-            <a:r>
-              <a:rPr sz="1300" b="1">
-                <a:solidFill>
-                  <a:srgbClr val="34D399"/>
-                </a:solidFill>
-                <a:latin typeface="Menlo"/>
-              </a:rPr>
-              <a:t>$ sandbox.check_command("rm -rf --no-preserve-root /")</a:t>
-            </a:r>
-          </a:p>
-          <a:p>
-            <a:pPr>
-              <a:lnSpc>
-                <a:spcPct val="115000"/>
-              </a:lnSpc>
-            </a:pPr>
-            <a:r>
-              <a:rPr sz="1300">
-                <a:solidFill>
-                  <a:srgbClr val="CBD5E1"/>
-                </a:solidFill>
-                <a:latin typeface="Menlo"/>
-              </a:rPr>
-              <a:t>SandboxViolation: dangerous pattern blocked</a:t>
-            </a:r>
-          </a:p>
-          <a:p>
-            <a:pPr>
-              <a:lnSpc>
-                <a:spcPct val="115000"/>
-              </a:lnSpc>
-            </a:pPr>
-            <a:r>
-              <a:rPr sz="1300" b="1">
-                <a:solidFill>
-                  <a:srgbClr val="34D399"/>
-                </a:solidFill>
-                <a:latin typeface="Menlo"/>
-              </a:rPr>
-              <a:t>$ sandbox.check_command("ls -la")  # 白名单内</a:t>
-            </a:r>
-          </a:p>
-          <a:p>
-            <a:pPr>
-              <a:lnSpc>
-                <a:spcPct val="115000"/>
-              </a:lnSpc>
-            </a:pPr>
-            <a:r>
-              <a:rPr sz="1300">
-                <a:solidFill>
-                  <a:srgbClr val="CBD5E1"/>
-                </a:solidFill>
-                <a:latin typeface="Menlo"/>
-              </a:rPr>
-              <a:t>True</a:t>
-            </a:r>
-          </a:p>
-          <a:p>
-            <a:pPr>
-              <a:lnSpc>
-                <a:spcPct val="115000"/>
-              </a:lnSpc>
-            </a:pPr>
-            <a:r>
-              <a:rPr sz="1300" b="1">
-                <a:solidFill>
-                  <a:srgbClr val="34D399"/>
-                </a:solidFill>
-                <a:latin typeface="Menlo"/>
-              </a:rPr>
-              <a:t>$ sandbox.check_read("/etc/passwd")  # roots 外</a:t>
-            </a:r>
-          </a:p>
-          <a:p>
-            <a:pPr>
-              <a:lnSpc>
-                <a:spcPct val="115000"/>
-              </a:lnSpc>
-            </a:pPr>
-            <a:r>
-              <a:rPr sz="1300">
-                <a:solidFill>
-                  <a:srgbClr val="CBD5E1"/>
-                </a:solidFill>
-                <a:latin typeface="Menlo"/>
-              </a:rPr>
-              <a:t>SandboxViolation: read denied outside roots</a:t>
-            </a:r>
-          </a:p>
-        </p:txBody>
-      </p:sp>
-      <p:sp>
-        <p:nvSpPr>
-          <p:cNvPr id="13" name="TextBox 12"/>
-          <p:cNvSpPr txBox="1"/>
-          <p:nvPr/>
-        </p:nvSpPr>
-        <p:spPr>
-          <a:xfrm>
-            <a:off x="10287000" y="6534150"/>
-            <a:ext cx="1619250" cy="266700"/>
-          </a:xfrm>
-          <a:prstGeom prst="rect">
-            <a:avLst/>
-          </a:prstGeom>
-          <a:noFill/>
-        </p:spPr>
-        <p:txBody>
-          <a:bodyPr wrap="square" anchor="ctr">
-            <a:spAutoFit/>
-          </a:bodyPr>
-          <a:lstStyle/>
-          <a:p>
-            <a:pPr algn="r">
-              <a:lnSpc>
-                <a:spcPct val="100000"/>
-              </a:lnSpc>
-            </a:pPr>
-            <a:r>
               <a:rPr sz="900" b="0">
                 <a:solidFill>
                   <a:srgbClr val="94A3B8"/>
@@ -4351,7 +4312,7 @@
       </p:sp>
       <p:sp>
         <p:nvSpPr>
-          <p:cNvPr id="14" name="TextBox 13"/>
+          <p:cNvPr id="13" name="TextBox 12"/>
           <p:cNvSpPr txBox="1"/>
           <p:nvPr/>
         </p:nvSpPr>
@@ -8633,7 +8594,7 @@
                 </a:solidFill>
                 <a:latin typeface="PingFang SC"/>
               </a:rPr>
-              <a:t>5. destroy(用完即毁)|资源上限+drop caps</a:t>
+              <a:t>5. destroy(用完即毁)</a:t>
             </a:r>
           </a:p>
         </p:txBody>
@@ -20240,106 +20201,14 @@
       </p:sp>
       <p:sp>
         <p:nvSpPr>
-          <p:cNvPr id="6" name="Rounded Rectangle 5"/>
-          <p:cNvSpPr/>
-          <p:nvPr/>
-        </p:nvSpPr>
-        <p:spPr>
-          <a:xfrm>
-            <a:off x="1905000" y="952500"/>
-            <a:ext cx="2819400" cy="1143000"/>
-          </a:xfrm>
-          <a:prstGeom prst="roundRect">
-            <a:avLst>
-              <a:gd name="adj" fmla="val 8000"/>
-            </a:avLst>
-          </a:prstGeom>
-          <a:solidFill>
-            <a:srgbClr val="FFFFFF"/>
-          </a:solidFill>
-          <a:ln w="12700">
-            <a:solidFill>
-              <a:srgbClr val="2563EB"/>
-            </a:solidFill>
-          </a:ln>
-          <a:effectLst/>
-        </p:spPr>
-        <p:style>
-          <a:lnRef idx="1">
-            <a:schemeClr val="accent1"/>
-          </a:lnRef>
-          <a:fillRef idx="3">
-            <a:schemeClr val="accent1"/>
-          </a:fillRef>
-          <a:effectRef idx="2">
-            <a:schemeClr val="accent1"/>
-          </a:effectRef>
-          <a:fontRef idx="minor">
-            <a:schemeClr val="lt1"/>
-          </a:fontRef>
-        </p:style>
-        <p:txBody>
-          <a:bodyPr rtlCol="0" anchor="ctr"/>
-          <a:lstStyle/>
-          <a:p>
-            <a:pPr algn="ctr"/>
-          </a:p>
-        </p:txBody>
-      </p:sp>
-      <p:sp>
-        <p:nvSpPr>
-          <p:cNvPr id="7" name="Rectangle 6"/>
-          <p:cNvSpPr/>
-          <p:nvPr/>
-        </p:nvSpPr>
-        <p:spPr>
-          <a:xfrm>
-            <a:off x="1905000" y="952500"/>
-            <a:ext cx="47625" cy="1143000"/>
-          </a:xfrm>
-          <a:prstGeom prst="rect">
-            <a:avLst/>
-          </a:prstGeom>
-          <a:solidFill>
-            <a:srgbClr val="2563EB"/>
-          </a:solidFill>
-          <a:ln>
-            <a:noFill/>
-          </a:ln>
-          <a:effectLst/>
-        </p:spPr>
-        <p:style>
-          <a:lnRef idx="1">
-            <a:schemeClr val="accent1"/>
-          </a:lnRef>
-          <a:fillRef idx="3">
-            <a:schemeClr val="accent1"/>
-          </a:fillRef>
-          <a:effectRef idx="2">
-            <a:schemeClr val="accent1"/>
-          </a:effectRef>
-          <a:fontRef idx="minor">
-            <a:schemeClr val="lt1"/>
-          </a:fontRef>
-        </p:style>
-        <p:txBody>
-          <a:bodyPr rtlCol="0" anchor="ctr"/>
-          <a:lstStyle/>
-          <a:p>
-            <a:pPr algn="ctr"/>
-          </a:p>
-        </p:txBody>
-      </p:sp>
-      <p:sp>
-        <p:nvSpPr>
-          <p:cNvPr id="8" name="TextBox 7"/>
+          <p:cNvPr id="6" name="TextBox 5"/>
           <p:cNvSpPr txBox="1"/>
           <p:nvPr/>
         </p:nvSpPr>
         <p:spPr>
           <a:xfrm>
-            <a:off x="2038350" y="952500"/>
-            <a:ext cx="2590800" cy="1143000"/>
+            <a:off x="1962150" y="685800"/>
+            <a:ext cx="1905000" cy="209550"/>
           </a:xfrm>
           <a:prstGeom prst="rect">
             <a:avLst/>
@@ -20358,26 +20227,26 @@
               </a:lnSpc>
             </a:pPr>
             <a:r>
-              <a:rPr sz="1200" b="1">
-                <a:solidFill>
-                  <a:srgbClr val="475569"/>
+              <a:rPr sz="1100" b="1">
+                <a:solidFill>
+                  <a:srgbClr val="2563EB"/>
                 </a:solidFill>
                 <a:latin typeface="PingFang SC"/>
               </a:rPr>
-              <a:t>文件:allowed_roots 可读</a:t>
-            </a:r>
-          </a:p>
-        </p:txBody>
-      </p:sp>
-      <p:sp>
-        <p:nvSpPr>
-          <p:cNvPr id="9" name="Rounded Rectangle 8"/>
-          <p:cNvSpPr/>
-          <p:nvPr/>
-        </p:nvSpPr>
-        <p:spPr>
-          <a:xfrm>
-            <a:off x="4876800" y="952500"/>
+              <a:t>L1</a:t>
+            </a:r>
+          </a:p>
+        </p:txBody>
+      </p:sp>
+      <p:sp>
+        <p:nvSpPr>
+          <p:cNvPr id="7" name="Rounded Rectangle 6"/>
+          <p:cNvSpPr/>
+          <p:nvPr/>
+        </p:nvSpPr>
+        <p:spPr>
+          <a:xfrm>
+            <a:off x="1905000" y="952500"/>
             <a:ext cx="2819400" cy="1143000"/>
           </a:xfrm>
           <a:prstGeom prst="roundRect">
@@ -20419,7 +20288,138 @@
       </p:sp>
       <p:sp>
         <p:nvSpPr>
-          <p:cNvPr id="10" name="Rectangle 9"/>
+          <p:cNvPr id="8" name="Rectangle 7"/>
+          <p:cNvSpPr/>
+          <p:nvPr/>
+        </p:nvSpPr>
+        <p:spPr>
+          <a:xfrm>
+            <a:off x="1905000" y="952500"/>
+            <a:ext cx="47625" cy="1143000"/>
+          </a:xfrm>
+          <a:prstGeom prst="rect">
+            <a:avLst/>
+          </a:prstGeom>
+          <a:solidFill>
+            <a:srgbClr val="2563EB"/>
+          </a:solidFill>
+          <a:ln>
+            <a:noFill/>
+          </a:ln>
+          <a:effectLst/>
+        </p:spPr>
+        <p:style>
+          <a:lnRef idx="1">
+            <a:schemeClr val="accent1"/>
+          </a:lnRef>
+          <a:fillRef idx="3">
+            <a:schemeClr val="accent1"/>
+          </a:fillRef>
+          <a:effectRef idx="2">
+            <a:schemeClr val="accent1"/>
+          </a:effectRef>
+          <a:fontRef idx="minor">
+            <a:schemeClr val="lt1"/>
+          </a:fontRef>
+        </p:style>
+        <p:txBody>
+          <a:bodyPr rtlCol="0" anchor="ctr"/>
+          <a:lstStyle/>
+          <a:p>
+            <a:pPr algn="ctr"/>
+          </a:p>
+        </p:txBody>
+      </p:sp>
+      <p:sp>
+        <p:nvSpPr>
+          <p:cNvPr id="9" name="TextBox 8"/>
+          <p:cNvSpPr txBox="1"/>
+          <p:nvPr/>
+        </p:nvSpPr>
+        <p:spPr>
+          <a:xfrm>
+            <a:off x="2057400" y="952500"/>
+            <a:ext cx="2552700" cy="1143000"/>
+          </a:xfrm>
+          <a:prstGeom prst="rect">
+            <a:avLst/>
+          </a:prstGeom>
+          <a:noFill/>
+        </p:spPr>
+        <p:txBody>
+          <a:bodyPr wrap="none" anchor="ctr">
+            <a:spAutoFit/>
+          </a:bodyPr>
+          <a:lstStyle/>
+          <a:p>
+            <a:pPr algn="l">
+              <a:lnSpc>
+                <a:spcPct val="115000"/>
+              </a:lnSpc>
+            </a:pPr>
+            <a:r>
+              <a:rPr sz="900" b="1">
+                <a:solidFill>
+                  <a:srgbClr val="0B1D3A"/>
+                </a:solidFill>
+                <a:latin typeface="PingFang SC"/>
+              </a:rPr>
+              <a:t>文件:allowed_roots 可读</a:t>
+            </a:r>
+          </a:p>
+        </p:txBody>
+      </p:sp>
+      <p:sp>
+        <p:nvSpPr>
+          <p:cNvPr id="10" name="Rounded Rectangle 9"/>
+          <p:cNvSpPr/>
+          <p:nvPr/>
+        </p:nvSpPr>
+        <p:spPr>
+          <a:xfrm>
+            <a:off x="4876800" y="952500"/>
+            <a:ext cx="2819400" cy="1143000"/>
+          </a:xfrm>
+          <a:prstGeom prst="roundRect">
+            <a:avLst>
+              <a:gd name="adj" fmla="val 8000"/>
+            </a:avLst>
+          </a:prstGeom>
+          <a:solidFill>
+            <a:srgbClr val="FFFFFF"/>
+          </a:solidFill>
+          <a:ln w="12700">
+            <a:solidFill>
+              <a:srgbClr val="2563EB"/>
+            </a:solidFill>
+          </a:ln>
+          <a:effectLst/>
+        </p:spPr>
+        <p:style>
+          <a:lnRef idx="1">
+            <a:schemeClr val="accent1"/>
+          </a:lnRef>
+          <a:fillRef idx="3">
+            <a:schemeClr val="accent1"/>
+          </a:fillRef>
+          <a:effectRef idx="2">
+            <a:schemeClr val="accent1"/>
+          </a:effectRef>
+          <a:fontRef idx="minor">
+            <a:schemeClr val="lt1"/>
+          </a:fontRef>
+        </p:style>
+        <p:txBody>
+          <a:bodyPr rtlCol="0" anchor="ctr"/>
+          <a:lstStyle/>
+          <a:p>
+            <a:pPr algn="ctr"/>
+          </a:p>
+        </p:txBody>
+      </p:sp>
+      <p:sp>
+        <p:nvSpPr>
+          <p:cNvPr id="11" name="Rectangle 10"/>
           <p:cNvSpPr/>
           <p:nvPr/>
         </p:nvSpPr>
@@ -20463,14 +20463,396 @@
       </p:sp>
       <p:sp>
         <p:nvSpPr>
-          <p:cNvPr id="11" name="TextBox 10"/>
+          <p:cNvPr id="12" name="TextBox 11"/>
           <p:cNvSpPr txBox="1"/>
           <p:nvPr/>
         </p:nvSpPr>
         <p:spPr>
           <a:xfrm>
-            <a:off x="5010150" y="952500"/>
-            <a:ext cx="2590800" cy="1143000"/>
+            <a:off x="5029200" y="952500"/>
+            <a:ext cx="2552700" cy="1143000"/>
+          </a:xfrm>
+          <a:prstGeom prst="rect">
+            <a:avLst/>
+          </a:prstGeom>
+          <a:noFill/>
+        </p:spPr>
+        <p:txBody>
+          <a:bodyPr wrap="none" anchor="ctr">
+            <a:spAutoFit/>
+          </a:bodyPr>
+          <a:lstStyle/>
+          <a:p>
+            <a:pPr algn="l">
+              <a:lnSpc>
+                <a:spcPct val="115000"/>
+              </a:lnSpc>
+            </a:pPr>
+            <a:r>
+              <a:rPr sz="1100" b="1">
+                <a:solidFill>
+                  <a:srgbClr val="0B1D3A"/>
+                </a:solidFill>
+                <a:latin typeface="PingFang SC"/>
+              </a:rPr>
+              <a:t>writable_roots 可写</a:t>
+            </a:r>
+          </a:p>
+        </p:txBody>
+      </p:sp>
+      <p:sp>
+        <p:nvSpPr>
+          <p:cNvPr id="13" name="Rounded Rectangle 12"/>
+          <p:cNvSpPr/>
+          <p:nvPr/>
+        </p:nvSpPr>
+        <p:spPr>
+          <a:xfrm>
+            <a:off x="7848600" y="952500"/>
+            <a:ext cx="2819400" cy="1143000"/>
+          </a:xfrm>
+          <a:prstGeom prst="roundRect">
+            <a:avLst>
+              <a:gd name="adj" fmla="val 8000"/>
+            </a:avLst>
+          </a:prstGeom>
+          <a:solidFill>
+            <a:srgbClr val="FFFFFF"/>
+          </a:solidFill>
+          <a:ln w="12700">
+            <a:solidFill>
+              <a:srgbClr val="2563EB"/>
+            </a:solidFill>
+          </a:ln>
+          <a:effectLst/>
+        </p:spPr>
+        <p:style>
+          <a:lnRef idx="1">
+            <a:schemeClr val="accent1"/>
+          </a:lnRef>
+          <a:fillRef idx="3">
+            <a:schemeClr val="accent1"/>
+          </a:fillRef>
+          <a:effectRef idx="2">
+            <a:schemeClr val="accent1"/>
+          </a:effectRef>
+          <a:fontRef idx="minor">
+            <a:schemeClr val="lt1"/>
+          </a:fontRef>
+        </p:style>
+        <p:txBody>
+          <a:bodyPr rtlCol="0" anchor="ctr"/>
+          <a:lstStyle/>
+          <a:p>
+            <a:pPr algn="ctr"/>
+          </a:p>
+        </p:txBody>
+      </p:sp>
+      <p:sp>
+        <p:nvSpPr>
+          <p:cNvPr id="14" name="Rectangle 13"/>
+          <p:cNvSpPr/>
+          <p:nvPr/>
+        </p:nvSpPr>
+        <p:spPr>
+          <a:xfrm>
+            <a:off x="7848600" y="952500"/>
+            <a:ext cx="47625" cy="1143000"/>
+          </a:xfrm>
+          <a:prstGeom prst="rect">
+            <a:avLst/>
+          </a:prstGeom>
+          <a:solidFill>
+            <a:srgbClr val="2563EB"/>
+          </a:solidFill>
+          <a:ln>
+            <a:noFill/>
+          </a:ln>
+          <a:effectLst/>
+        </p:spPr>
+        <p:style>
+          <a:lnRef idx="1">
+            <a:schemeClr val="accent1"/>
+          </a:lnRef>
+          <a:fillRef idx="3">
+            <a:schemeClr val="accent1"/>
+          </a:fillRef>
+          <a:effectRef idx="2">
+            <a:schemeClr val="accent1"/>
+          </a:effectRef>
+          <a:fontRef idx="minor">
+            <a:schemeClr val="lt1"/>
+          </a:fontRef>
+        </p:style>
+        <p:txBody>
+          <a:bodyPr rtlCol="0" anchor="ctr"/>
+          <a:lstStyle/>
+          <a:p>
+            <a:pPr algn="ctr"/>
+          </a:p>
+        </p:txBody>
+      </p:sp>
+      <p:sp>
+        <p:nvSpPr>
+          <p:cNvPr id="15" name="TextBox 14"/>
+          <p:cNvSpPr txBox="1"/>
+          <p:nvPr/>
+        </p:nvSpPr>
+        <p:spPr>
+          <a:xfrm>
+            <a:off x="8001000" y="952500"/>
+            <a:ext cx="2552700" cy="1143000"/>
+          </a:xfrm>
+          <a:prstGeom prst="rect">
+            <a:avLst/>
+          </a:prstGeom>
+          <a:noFill/>
+        </p:spPr>
+        <p:txBody>
+          <a:bodyPr wrap="none" anchor="ctr">
+            <a:spAutoFit/>
+          </a:bodyPr>
+          <a:lstStyle/>
+          <a:p>
+            <a:pPr algn="l">
+              <a:lnSpc>
+                <a:spcPct val="115000"/>
+              </a:lnSpc>
+            </a:pPr>
+            <a:r>
+              <a:rPr sz="1300" b="1">
+                <a:solidFill>
+                  <a:srgbClr val="0B1D3A"/>
+                </a:solidFill>
+                <a:latin typeface="PingFang SC"/>
+              </a:rPr>
+              <a:t>realpath 防逃逸</a:t>
+            </a:r>
+          </a:p>
+        </p:txBody>
+      </p:sp>
+      <p:cxnSp>
+        <p:nvCxnSpPr>
+          <p:cNvPr id="16" name="Connector 15"/>
+          <p:cNvCxnSpPr/>
+          <p:nvPr/>
+        </p:nvCxnSpPr>
+        <p:spPr>
+          <a:xfrm>
+            <a:off x="6096000" y="2152650"/>
+            <a:ext cx="0" cy="152400"/>
+          </a:xfrm>
+          <a:prstGeom prst="line">
+            <a:avLst/>
+          </a:prstGeom>
+          <a:ln w="17780">
+            <a:solidFill>
+              <a:srgbClr val="475569"/>
+            </a:solidFill>
+          </a:ln>
+        </p:spPr>
+        <p:style>
+          <a:lnRef idx="2">
+            <a:schemeClr val="accent1"/>
+          </a:lnRef>
+          <a:fillRef idx="0">
+            <a:schemeClr val="accent1"/>
+          </a:fillRef>
+          <a:effectRef idx="1">
+            <a:schemeClr val="accent1"/>
+          </a:effectRef>
+          <a:fontRef idx="minor">
+            <a:schemeClr val="tx1"/>
+          </a:fontRef>
+        </p:style>
+      </p:cxnSp>
+      <p:sp>
+        <p:nvSpPr>
+          <p:cNvPr id="17" name="Isosceles Triangle 16"/>
+          <p:cNvSpPr/>
+          <p:nvPr/>
+        </p:nvSpPr>
+        <p:spPr>
+          <a:xfrm rot="10800000">
+            <a:off x="6053138" y="2219326"/>
+            <a:ext cx="85725" cy="85725"/>
+          </a:xfrm>
+          <a:prstGeom prst="triangle">
+            <a:avLst/>
+          </a:prstGeom>
+          <a:solidFill>
+            <a:srgbClr val="475569"/>
+          </a:solidFill>
+          <a:ln>
+            <a:noFill/>
+          </a:ln>
+          <a:effectLst/>
+        </p:spPr>
+        <p:style>
+          <a:lnRef idx="1">
+            <a:schemeClr val="accent1"/>
+          </a:lnRef>
+          <a:fillRef idx="3">
+            <a:schemeClr val="accent1"/>
+          </a:fillRef>
+          <a:effectRef idx="2">
+            <a:schemeClr val="accent1"/>
+          </a:effectRef>
+          <a:fontRef idx="minor">
+            <a:schemeClr val="lt1"/>
+          </a:fontRef>
+        </p:style>
+        <p:txBody>
+          <a:bodyPr rtlCol="0" anchor="ctr"/>
+          <a:lstStyle/>
+          <a:p>
+            <a:pPr algn="ctr"/>
+          </a:p>
+        </p:txBody>
+      </p:sp>
+      <p:sp>
+        <p:nvSpPr>
+          <p:cNvPr id="18" name="Rounded Rectangle 17"/>
+          <p:cNvSpPr/>
+          <p:nvPr/>
+        </p:nvSpPr>
+        <p:spPr>
+          <a:xfrm>
+            <a:off x="5743575" y="2133600"/>
+            <a:ext cx="704850" cy="171450"/>
+          </a:xfrm>
+          <a:prstGeom prst="roundRect">
+            <a:avLst>
+              <a:gd name="adj" fmla="val 8000"/>
+            </a:avLst>
+          </a:prstGeom>
+          <a:solidFill>
+            <a:srgbClr val="FFFFFF"/>
+          </a:solidFill>
+          <a:ln w="12700">
+            <a:solidFill>
+              <a:srgbClr val="DDE5EE"/>
+            </a:solidFill>
+          </a:ln>
+          <a:effectLst/>
+        </p:spPr>
+        <p:style>
+          <a:lnRef idx="1">
+            <a:schemeClr val="accent1"/>
+          </a:lnRef>
+          <a:fillRef idx="3">
+            <a:schemeClr val="accent1"/>
+          </a:fillRef>
+          <a:effectRef idx="2">
+            <a:schemeClr val="accent1"/>
+          </a:effectRef>
+          <a:fontRef idx="minor">
+            <a:schemeClr val="lt1"/>
+          </a:fontRef>
+        </p:style>
+        <p:txBody>
+          <a:bodyPr rtlCol="0" anchor="ctr"/>
+          <a:lstStyle/>
+          <a:p>
+            <a:pPr algn="ctr"/>
+          </a:p>
+        </p:txBody>
+      </p:sp>
+      <p:sp>
+        <p:nvSpPr>
+          <p:cNvPr id="19" name="TextBox 18"/>
+          <p:cNvSpPr txBox="1"/>
+          <p:nvPr/>
+        </p:nvSpPr>
+        <p:spPr>
+          <a:xfrm>
+            <a:off x="5743575" y="2133600"/>
+            <a:ext cx="704850" cy="171450"/>
+          </a:xfrm>
+          <a:prstGeom prst="rect">
+            <a:avLst/>
+          </a:prstGeom>
+          <a:noFill/>
+        </p:spPr>
+        <p:txBody>
+          <a:bodyPr wrap="square" anchor="ctr">
+            <a:spAutoFit/>
+          </a:bodyPr>
+          <a:lstStyle/>
+          <a:p>
+            <a:pPr algn="ctr">
+              <a:lnSpc>
+                <a:spcPct val="100000"/>
+              </a:lnSpc>
+            </a:pPr>
+            <a:r>
+              <a:rPr sz="1100" b="1">
+                <a:solidFill>
+                  <a:srgbClr val="0B1D3A"/>
+                </a:solidFill>
+                <a:latin typeface="PingFang SC"/>
+              </a:rPr>
+              <a:t>声明</a:t>
+            </a:r>
+          </a:p>
+        </p:txBody>
+      </p:sp>
+      <p:sp>
+        <p:nvSpPr>
+          <p:cNvPr id="20" name="Rounded Rectangle 19"/>
+          <p:cNvSpPr/>
+          <p:nvPr/>
+        </p:nvSpPr>
+        <p:spPr>
+          <a:xfrm>
+            <a:off x="1847850" y="2305050"/>
+            <a:ext cx="8877300" cy="1219200"/>
+          </a:xfrm>
+          <a:prstGeom prst="roundRect">
+            <a:avLst>
+              <a:gd name="adj" fmla="val 8000"/>
+            </a:avLst>
+          </a:prstGeom>
+          <a:solidFill>
+            <a:srgbClr val="F1F5F9"/>
+          </a:solidFill>
+          <a:ln>
+            <a:noFill/>
+          </a:ln>
+          <a:effectLst/>
+        </p:spPr>
+        <p:style>
+          <a:lnRef idx="1">
+            <a:schemeClr val="accent1"/>
+          </a:lnRef>
+          <a:fillRef idx="3">
+            <a:schemeClr val="accent1"/>
+          </a:fillRef>
+          <a:effectRef idx="2">
+            <a:schemeClr val="accent1"/>
+          </a:effectRef>
+          <a:fontRef idx="minor">
+            <a:schemeClr val="lt1"/>
+          </a:fontRef>
+        </p:style>
+        <p:txBody>
+          <a:bodyPr rtlCol="0" anchor="ctr"/>
+          <a:lstStyle/>
+          <a:p>
+            <a:pPr algn="ctr"/>
+          </a:p>
+        </p:txBody>
+      </p:sp>
+      <p:sp>
+        <p:nvSpPr>
+          <p:cNvPr id="21" name="TextBox 20"/>
+          <p:cNvSpPr txBox="1"/>
+          <p:nvPr/>
+        </p:nvSpPr>
+        <p:spPr>
+          <a:xfrm>
+            <a:off x="1962150" y="2076450"/>
+            <a:ext cx="1905000" cy="209550"/>
           </a:xfrm>
           <a:prstGeom prst="rect">
             <a:avLst/>
@@ -20489,26 +20871,26 @@
               </a:lnSpc>
             </a:pPr>
             <a:r>
-              <a:rPr sz="1200" b="1">
-                <a:solidFill>
-                  <a:srgbClr val="475569"/>
+              <a:rPr sz="1100" b="1">
+                <a:solidFill>
+                  <a:srgbClr val="14B8A6"/>
                 </a:solidFill>
                 <a:latin typeface="PingFang SC"/>
               </a:rPr>
-              <a:t>writable_roots 可写</a:t>
-            </a:r>
-          </a:p>
-        </p:txBody>
-      </p:sp>
-      <p:sp>
-        <p:nvSpPr>
-          <p:cNvPr id="12" name="Rounded Rectangle 11"/>
-          <p:cNvSpPr/>
-          <p:nvPr/>
-        </p:nvSpPr>
-        <p:spPr>
-          <a:xfrm>
-            <a:off x="7848600" y="952500"/>
+              <a:t>L2</a:t>
+            </a:r>
+          </a:p>
+        </p:txBody>
+      </p:sp>
+      <p:sp>
+        <p:nvSpPr>
+          <p:cNvPr id="22" name="Rounded Rectangle 21"/>
+          <p:cNvSpPr/>
+          <p:nvPr/>
+        </p:nvSpPr>
+        <p:spPr>
+          <a:xfrm>
+            <a:off x="1905000" y="2343150"/>
             <a:ext cx="2819400" cy="1143000"/>
           </a:xfrm>
           <a:prstGeom prst="roundRect">
@@ -20521,7 +20903,7 @@
           </a:solidFill>
           <a:ln w="12700">
             <a:solidFill>
-              <a:srgbClr val="2563EB"/>
+              <a:srgbClr val="14B8A6"/>
             </a:solidFill>
           </a:ln>
           <a:effectLst/>
@@ -20550,20 +20932,20 @@
       </p:sp>
       <p:sp>
         <p:nvSpPr>
-          <p:cNvPr id="13" name="Rectangle 12"/>
-          <p:cNvSpPr/>
-          <p:nvPr/>
-        </p:nvSpPr>
-        <p:spPr>
-          <a:xfrm>
-            <a:off x="7848600" y="952500"/>
+          <p:cNvPr id="23" name="Rectangle 22"/>
+          <p:cNvSpPr/>
+          <p:nvPr/>
+        </p:nvSpPr>
+        <p:spPr>
+          <a:xfrm>
+            <a:off x="1905000" y="2343150"/>
             <a:ext cx="47625" cy="1143000"/>
           </a:xfrm>
           <a:prstGeom prst="rect">
             <a:avLst/>
           </a:prstGeom>
           <a:solidFill>
-            <a:srgbClr val="2563EB"/>
+            <a:srgbClr val="14B8A6"/>
           </a:solidFill>
           <a:ln>
             <a:noFill/>
@@ -20594,14 +20976,527 @@
       </p:sp>
       <p:sp>
         <p:nvSpPr>
-          <p:cNvPr id="14" name="TextBox 13"/>
+          <p:cNvPr id="24" name="TextBox 23"/>
           <p:cNvSpPr txBox="1"/>
           <p:nvPr/>
         </p:nvSpPr>
         <p:spPr>
           <a:xfrm>
-            <a:off x="7981950" y="952500"/>
-            <a:ext cx="2590800" cy="1143000"/>
+            <a:off x="2057400" y="2343150"/>
+            <a:ext cx="2552700" cy="1143000"/>
+          </a:xfrm>
+          <a:prstGeom prst="rect">
+            <a:avLst/>
+          </a:prstGeom>
+          <a:noFill/>
+        </p:spPr>
+        <p:txBody>
+          <a:bodyPr wrap="none" anchor="ctr">
+            <a:spAutoFit/>
+          </a:bodyPr>
+          <a:lstStyle/>
+          <a:p>
+            <a:pPr algn="l">
+              <a:lnSpc>
+                <a:spcPct val="115000"/>
+              </a:lnSpc>
+            </a:pPr>
+            <a:r>
+              <a:rPr sz="1300" b="1">
+                <a:solidFill>
+                  <a:srgbClr val="0B1D3A"/>
+                </a:solidFill>
+                <a:latin typeface="PingFang SC"/>
+              </a:rPr>
+              <a:t>Shell:命令白名单</a:t>
+            </a:r>
+          </a:p>
+        </p:txBody>
+      </p:sp>
+      <p:sp>
+        <p:nvSpPr>
+          <p:cNvPr id="25" name="Rounded Rectangle 24"/>
+          <p:cNvSpPr/>
+          <p:nvPr/>
+        </p:nvSpPr>
+        <p:spPr>
+          <a:xfrm>
+            <a:off x="4876800" y="2343150"/>
+            <a:ext cx="2819400" cy="1143000"/>
+          </a:xfrm>
+          <a:prstGeom prst="roundRect">
+            <a:avLst>
+              <a:gd name="adj" fmla="val 8000"/>
+            </a:avLst>
+          </a:prstGeom>
+          <a:solidFill>
+            <a:srgbClr val="FFFFFF"/>
+          </a:solidFill>
+          <a:ln w="12700">
+            <a:solidFill>
+              <a:srgbClr val="14B8A6"/>
+            </a:solidFill>
+          </a:ln>
+          <a:effectLst/>
+        </p:spPr>
+        <p:style>
+          <a:lnRef idx="1">
+            <a:schemeClr val="accent1"/>
+          </a:lnRef>
+          <a:fillRef idx="3">
+            <a:schemeClr val="accent1"/>
+          </a:fillRef>
+          <a:effectRef idx="2">
+            <a:schemeClr val="accent1"/>
+          </a:effectRef>
+          <a:fontRef idx="minor">
+            <a:schemeClr val="lt1"/>
+          </a:fontRef>
+        </p:style>
+        <p:txBody>
+          <a:bodyPr rtlCol="0" anchor="ctr"/>
+          <a:lstStyle/>
+          <a:p>
+            <a:pPr algn="ctr"/>
+          </a:p>
+        </p:txBody>
+      </p:sp>
+      <p:sp>
+        <p:nvSpPr>
+          <p:cNvPr id="26" name="Rectangle 25"/>
+          <p:cNvSpPr/>
+          <p:nvPr/>
+        </p:nvSpPr>
+        <p:spPr>
+          <a:xfrm>
+            <a:off x="4876800" y="2343150"/>
+            <a:ext cx="47625" cy="1143000"/>
+          </a:xfrm>
+          <a:prstGeom prst="rect">
+            <a:avLst/>
+          </a:prstGeom>
+          <a:solidFill>
+            <a:srgbClr val="14B8A6"/>
+          </a:solidFill>
+          <a:ln>
+            <a:noFill/>
+          </a:ln>
+          <a:effectLst/>
+        </p:spPr>
+        <p:style>
+          <a:lnRef idx="1">
+            <a:schemeClr val="accent1"/>
+          </a:lnRef>
+          <a:fillRef idx="3">
+            <a:schemeClr val="accent1"/>
+          </a:fillRef>
+          <a:effectRef idx="2">
+            <a:schemeClr val="accent1"/>
+          </a:effectRef>
+          <a:fontRef idx="minor">
+            <a:schemeClr val="lt1"/>
+          </a:fontRef>
+        </p:style>
+        <p:txBody>
+          <a:bodyPr rtlCol="0" anchor="ctr"/>
+          <a:lstStyle/>
+          <a:p>
+            <a:pPr algn="ctr"/>
+          </a:p>
+        </p:txBody>
+      </p:sp>
+      <p:sp>
+        <p:nvSpPr>
+          <p:cNvPr id="27" name="TextBox 26"/>
+          <p:cNvSpPr txBox="1"/>
+          <p:nvPr/>
+        </p:nvSpPr>
+        <p:spPr>
+          <a:xfrm>
+            <a:off x="5029200" y="2343150"/>
+            <a:ext cx="2552700" cy="1143000"/>
+          </a:xfrm>
+          <a:prstGeom prst="rect">
+            <a:avLst/>
+          </a:prstGeom>
+          <a:noFill/>
+        </p:spPr>
+        <p:txBody>
+          <a:bodyPr wrap="none" anchor="ctr">
+            <a:spAutoFit/>
+          </a:bodyPr>
+          <a:lstStyle/>
+          <a:p>
+            <a:pPr algn="l">
+              <a:lnSpc>
+                <a:spcPct val="115000"/>
+              </a:lnSpc>
+            </a:pPr>
+            <a:r>
+              <a:rPr sz="1300" b="1">
+                <a:solidFill>
+                  <a:srgbClr val="0B1D3A"/>
+                </a:solidFill>
+                <a:latin typeface="PingFang SC"/>
+              </a:rPr>
+              <a:t>危险模式硬拦截</a:t>
+            </a:r>
+          </a:p>
+        </p:txBody>
+      </p:sp>
+      <p:sp>
+        <p:nvSpPr>
+          <p:cNvPr id="28" name="Rounded Rectangle 27"/>
+          <p:cNvSpPr/>
+          <p:nvPr/>
+        </p:nvSpPr>
+        <p:spPr>
+          <a:xfrm>
+            <a:off x="7848600" y="2343150"/>
+            <a:ext cx="2819400" cy="1143000"/>
+          </a:xfrm>
+          <a:prstGeom prst="roundRect">
+            <a:avLst>
+              <a:gd name="adj" fmla="val 8000"/>
+            </a:avLst>
+          </a:prstGeom>
+          <a:solidFill>
+            <a:srgbClr val="FFFFFF"/>
+          </a:solidFill>
+          <a:ln w="12700">
+            <a:solidFill>
+              <a:srgbClr val="14B8A6"/>
+            </a:solidFill>
+          </a:ln>
+          <a:effectLst/>
+        </p:spPr>
+        <p:style>
+          <a:lnRef idx="1">
+            <a:schemeClr val="accent1"/>
+          </a:lnRef>
+          <a:fillRef idx="3">
+            <a:schemeClr val="accent1"/>
+          </a:fillRef>
+          <a:effectRef idx="2">
+            <a:schemeClr val="accent1"/>
+          </a:effectRef>
+          <a:fontRef idx="minor">
+            <a:schemeClr val="lt1"/>
+          </a:fontRef>
+        </p:style>
+        <p:txBody>
+          <a:bodyPr rtlCol="0" anchor="ctr"/>
+          <a:lstStyle/>
+          <a:p>
+            <a:pPr algn="ctr"/>
+          </a:p>
+        </p:txBody>
+      </p:sp>
+      <p:sp>
+        <p:nvSpPr>
+          <p:cNvPr id="29" name="Rectangle 28"/>
+          <p:cNvSpPr/>
+          <p:nvPr/>
+        </p:nvSpPr>
+        <p:spPr>
+          <a:xfrm>
+            <a:off x="7848600" y="2343150"/>
+            <a:ext cx="47625" cy="1143000"/>
+          </a:xfrm>
+          <a:prstGeom prst="rect">
+            <a:avLst/>
+          </a:prstGeom>
+          <a:solidFill>
+            <a:srgbClr val="14B8A6"/>
+          </a:solidFill>
+          <a:ln>
+            <a:noFill/>
+          </a:ln>
+          <a:effectLst/>
+        </p:spPr>
+        <p:style>
+          <a:lnRef idx="1">
+            <a:schemeClr val="accent1"/>
+          </a:lnRef>
+          <a:fillRef idx="3">
+            <a:schemeClr val="accent1"/>
+          </a:fillRef>
+          <a:effectRef idx="2">
+            <a:schemeClr val="accent1"/>
+          </a:effectRef>
+          <a:fontRef idx="minor">
+            <a:schemeClr val="lt1"/>
+          </a:fontRef>
+        </p:style>
+        <p:txBody>
+          <a:bodyPr rtlCol="0" anchor="ctr"/>
+          <a:lstStyle/>
+          <a:p>
+            <a:pPr algn="ctr"/>
+          </a:p>
+        </p:txBody>
+      </p:sp>
+      <p:sp>
+        <p:nvSpPr>
+          <p:cNvPr id="30" name="TextBox 29"/>
+          <p:cNvSpPr txBox="1"/>
+          <p:nvPr/>
+        </p:nvSpPr>
+        <p:spPr>
+          <a:xfrm>
+            <a:off x="8001000" y="2343150"/>
+            <a:ext cx="2552700" cy="1143000"/>
+          </a:xfrm>
+          <a:prstGeom prst="rect">
+            <a:avLst/>
+          </a:prstGeom>
+          <a:noFill/>
+        </p:spPr>
+        <p:txBody>
+          <a:bodyPr wrap="none" anchor="ctr">
+            <a:spAutoFit/>
+          </a:bodyPr>
+          <a:lstStyle/>
+          <a:p>
+            <a:pPr algn="l">
+              <a:lnSpc>
+                <a:spcPct val="115000"/>
+              </a:lnSpc>
+            </a:pPr>
+            <a:r>
+              <a:rPr sz="1100" b="1">
+                <a:solidFill>
+                  <a:srgbClr val="0B1D3A"/>
+                </a:solidFill>
+                <a:latin typeface="PingFang SC"/>
+              </a:rPr>
+              <a:t>禁用头部(sudo/dd)</a:t>
+            </a:r>
+          </a:p>
+        </p:txBody>
+      </p:sp>
+      <p:cxnSp>
+        <p:nvCxnSpPr>
+          <p:cNvPr id="31" name="Connector 30"/>
+          <p:cNvCxnSpPr/>
+          <p:nvPr/>
+        </p:nvCxnSpPr>
+        <p:spPr>
+          <a:xfrm>
+            <a:off x="6096000" y="3543300"/>
+            <a:ext cx="0" cy="152400"/>
+          </a:xfrm>
+          <a:prstGeom prst="line">
+            <a:avLst/>
+          </a:prstGeom>
+          <a:ln w="17780">
+            <a:solidFill>
+              <a:srgbClr val="475569"/>
+            </a:solidFill>
+          </a:ln>
+        </p:spPr>
+        <p:style>
+          <a:lnRef idx="2">
+            <a:schemeClr val="accent1"/>
+          </a:lnRef>
+          <a:fillRef idx="0">
+            <a:schemeClr val="accent1"/>
+          </a:fillRef>
+          <a:effectRef idx="1">
+            <a:schemeClr val="accent1"/>
+          </a:effectRef>
+          <a:fontRef idx="minor">
+            <a:schemeClr val="tx1"/>
+          </a:fontRef>
+        </p:style>
+      </p:cxnSp>
+      <p:sp>
+        <p:nvSpPr>
+          <p:cNvPr id="32" name="Isosceles Triangle 31"/>
+          <p:cNvSpPr/>
+          <p:nvPr/>
+        </p:nvSpPr>
+        <p:spPr>
+          <a:xfrm rot="10800000">
+            <a:off x="6053138" y="3609976"/>
+            <a:ext cx="85725" cy="85725"/>
+          </a:xfrm>
+          <a:prstGeom prst="triangle">
+            <a:avLst/>
+          </a:prstGeom>
+          <a:solidFill>
+            <a:srgbClr val="475569"/>
+          </a:solidFill>
+          <a:ln>
+            <a:noFill/>
+          </a:ln>
+          <a:effectLst/>
+        </p:spPr>
+        <p:style>
+          <a:lnRef idx="1">
+            <a:schemeClr val="accent1"/>
+          </a:lnRef>
+          <a:fillRef idx="3">
+            <a:schemeClr val="accent1"/>
+          </a:fillRef>
+          <a:effectRef idx="2">
+            <a:schemeClr val="accent1"/>
+          </a:effectRef>
+          <a:fontRef idx="minor">
+            <a:schemeClr val="lt1"/>
+          </a:fontRef>
+        </p:style>
+        <p:txBody>
+          <a:bodyPr rtlCol="0" anchor="ctr"/>
+          <a:lstStyle/>
+          <a:p>
+            <a:pPr algn="ctr"/>
+          </a:p>
+        </p:txBody>
+      </p:sp>
+      <p:sp>
+        <p:nvSpPr>
+          <p:cNvPr id="33" name="Rounded Rectangle 32"/>
+          <p:cNvSpPr/>
+          <p:nvPr/>
+        </p:nvSpPr>
+        <p:spPr>
+          <a:xfrm>
+            <a:off x="5743575" y="3524250"/>
+            <a:ext cx="704850" cy="171450"/>
+          </a:xfrm>
+          <a:prstGeom prst="roundRect">
+            <a:avLst>
+              <a:gd name="adj" fmla="val 8000"/>
+            </a:avLst>
+          </a:prstGeom>
+          <a:solidFill>
+            <a:srgbClr val="FFFFFF"/>
+          </a:solidFill>
+          <a:ln w="12700">
+            <a:solidFill>
+              <a:srgbClr val="DDE5EE"/>
+            </a:solidFill>
+          </a:ln>
+          <a:effectLst/>
+        </p:spPr>
+        <p:style>
+          <a:lnRef idx="1">
+            <a:schemeClr val="accent1"/>
+          </a:lnRef>
+          <a:fillRef idx="3">
+            <a:schemeClr val="accent1"/>
+          </a:fillRef>
+          <a:effectRef idx="2">
+            <a:schemeClr val="accent1"/>
+          </a:effectRef>
+          <a:fontRef idx="minor">
+            <a:schemeClr val="lt1"/>
+          </a:fontRef>
+        </p:style>
+        <p:txBody>
+          <a:bodyPr rtlCol="0" anchor="ctr"/>
+          <a:lstStyle/>
+          <a:p>
+            <a:pPr algn="ctr"/>
+          </a:p>
+        </p:txBody>
+      </p:sp>
+      <p:sp>
+        <p:nvSpPr>
+          <p:cNvPr id="34" name="TextBox 33"/>
+          <p:cNvSpPr txBox="1"/>
+          <p:nvPr/>
+        </p:nvSpPr>
+        <p:spPr>
+          <a:xfrm>
+            <a:off x="5743575" y="3524250"/>
+            <a:ext cx="704850" cy="171450"/>
+          </a:xfrm>
+          <a:prstGeom prst="rect">
+            <a:avLst/>
+          </a:prstGeom>
+          <a:noFill/>
+        </p:spPr>
+        <p:txBody>
+          <a:bodyPr wrap="square" anchor="ctr">
+            <a:spAutoFit/>
+          </a:bodyPr>
+          <a:lstStyle/>
+          <a:p>
+            <a:pPr algn="ctr">
+              <a:lnSpc>
+                <a:spcPct val="100000"/>
+              </a:lnSpc>
+            </a:pPr>
+            <a:r>
+              <a:rPr sz="1100" b="1">
+                <a:solidFill>
+                  <a:srgbClr val="0B1D3A"/>
+                </a:solidFill>
+                <a:latin typeface="PingFang SC"/>
+              </a:rPr>
+              <a:t>校验</a:t>
+            </a:r>
+          </a:p>
+        </p:txBody>
+      </p:sp>
+      <p:sp>
+        <p:nvSpPr>
+          <p:cNvPr id="35" name="Rounded Rectangle 34"/>
+          <p:cNvSpPr/>
+          <p:nvPr/>
+        </p:nvSpPr>
+        <p:spPr>
+          <a:xfrm>
+            <a:off x="1847850" y="3695700"/>
+            <a:ext cx="8877300" cy="1219200"/>
+          </a:xfrm>
+          <a:prstGeom prst="roundRect">
+            <a:avLst>
+              <a:gd name="adj" fmla="val 8000"/>
+            </a:avLst>
+          </a:prstGeom>
+          <a:solidFill>
+            <a:srgbClr val="F1F5F9"/>
+          </a:solidFill>
+          <a:ln>
+            <a:noFill/>
+          </a:ln>
+          <a:effectLst/>
+        </p:spPr>
+        <p:style>
+          <a:lnRef idx="1">
+            <a:schemeClr val="accent1"/>
+          </a:lnRef>
+          <a:fillRef idx="3">
+            <a:schemeClr val="accent1"/>
+          </a:fillRef>
+          <a:effectRef idx="2">
+            <a:schemeClr val="accent1"/>
+          </a:effectRef>
+          <a:fontRef idx="minor">
+            <a:schemeClr val="lt1"/>
+          </a:fontRef>
+        </p:style>
+        <p:txBody>
+          <a:bodyPr rtlCol="0" anchor="ctr"/>
+          <a:lstStyle/>
+          <a:p>
+            <a:pPr algn="ctr"/>
+          </a:p>
+        </p:txBody>
+      </p:sp>
+      <p:sp>
+        <p:nvSpPr>
+          <p:cNvPr id="36" name="TextBox 35"/>
+          <p:cNvSpPr txBox="1"/>
+          <p:nvPr/>
+        </p:nvSpPr>
+        <p:spPr>
+          <a:xfrm>
+            <a:off x="1962150" y="3467100"/>
+            <a:ext cx="1905000" cy="209550"/>
           </a:xfrm>
           <a:prstGeom prst="rect">
             <a:avLst/>
@@ -20620,145 +21515,27 @@
               </a:lnSpc>
             </a:pPr>
             <a:r>
-              <a:rPr sz="1200" b="1">
-                <a:solidFill>
-                  <a:srgbClr val="475569"/>
+              <a:rPr sz="1100" b="1">
+                <a:solidFill>
+                  <a:srgbClr val="8B5CF6"/>
                 </a:solidFill>
                 <a:latin typeface="PingFang SC"/>
               </a:rPr>
-              <a:t>realpath 防逃逸</a:t>
-            </a:r>
-          </a:p>
-        </p:txBody>
-      </p:sp>
-      <p:cxnSp>
-        <p:nvCxnSpPr>
-          <p:cNvPr id="15" name="Connector 14"/>
-          <p:cNvCxnSpPr/>
-          <p:nvPr/>
-        </p:nvCxnSpPr>
-        <p:spPr>
-          <a:xfrm>
-            <a:off x="6096000" y="2152650"/>
-            <a:ext cx="0" cy="152400"/>
-          </a:xfrm>
-          <a:prstGeom prst="line">
-            <a:avLst/>
-          </a:prstGeom>
-          <a:ln w="15240">
-            <a:solidFill>
-              <a:srgbClr val="94A3B8"/>
-            </a:solidFill>
-          </a:ln>
-        </p:spPr>
-        <p:style>
-          <a:lnRef idx="2">
-            <a:schemeClr val="accent1"/>
-          </a:lnRef>
-          <a:fillRef idx="0">
-            <a:schemeClr val="accent1"/>
-          </a:fillRef>
-          <a:effectRef idx="1">
-            <a:schemeClr val="accent1"/>
-          </a:effectRef>
-          <a:fontRef idx="minor">
-            <a:schemeClr val="tx1"/>
-          </a:fontRef>
-        </p:style>
-      </p:cxnSp>
-      <p:sp>
-        <p:nvSpPr>
-          <p:cNvPr id="16" name="Isosceles Triangle 15"/>
-          <p:cNvSpPr/>
-          <p:nvPr/>
-        </p:nvSpPr>
-        <p:spPr>
-          <a:xfrm rot="10800000">
-            <a:off x="6053138" y="2219326"/>
-            <a:ext cx="85725" cy="85725"/>
-          </a:xfrm>
-          <a:prstGeom prst="triangle">
-            <a:avLst/>
-          </a:prstGeom>
-          <a:solidFill>
-            <a:srgbClr val="94A3B8"/>
-          </a:solidFill>
-          <a:ln>
-            <a:noFill/>
-          </a:ln>
-          <a:effectLst/>
-        </p:spPr>
-        <p:style>
-          <a:lnRef idx="1">
-            <a:schemeClr val="accent1"/>
-          </a:lnRef>
-          <a:fillRef idx="3">
-            <a:schemeClr val="accent1"/>
-          </a:fillRef>
-          <a:effectRef idx="2">
-            <a:schemeClr val="accent1"/>
-          </a:effectRef>
-          <a:fontRef idx="minor">
-            <a:schemeClr val="lt1"/>
-          </a:fontRef>
-        </p:style>
-        <p:txBody>
-          <a:bodyPr rtlCol="0" anchor="ctr"/>
-          <a:lstStyle/>
-          <a:p>
-            <a:pPr algn="ctr"/>
-          </a:p>
-        </p:txBody>
-      </p:sp>
-      <p:sp>
-        <p:nvSpPr>
-          <p:cNvPr id="17" name="TextBox 16"/>
-          <p:cNvSpPr txBox="1"/>
-          <p:nvPr/>
-        </p:nvSpPr>
-        <p:spPr>
-          <a:xfrm>
-            <a:off x="6248400" y="2095500"/>
-            <a:ext cx="2095500" cy="247650"/>
-          </a:xfrm>
-          <a:prstGeom prst="rect">
-            <a:avLst/>
-          </a:prstGeom>
-          <a:noFill/>
-        </p:spPr>
-        <p:txBody>
-          <a:bodyPr wrap="square" anchor="ctr">
-            <a:spAutoFit/>
-          </a:bodyPr>
-          <a:lstStyle/>
-          <a:p>
-            <a:pPr algn="l">
-              <a:lnSpc>
-                <a:spcPct val="100000"/>
-              </a:lnSpc>
-            </a:pPr>
-            <a:r>
-              <a:rPr sz="1000" b="0">
-                <a:solidFill>
-                  <a:srgbClr val="94A3B8"/>
-                </a:solidFill>
-                <a:latin typeface="PingFang SC"/>
-              </a:rPr>
-              <a:t>声明</a:t>
-            </a:r>
-          </a:p>
-        </p:txBody>
-      </p:sp>
-      <p:sp>
-        <p:nvSpPr>
-          <p:cNvPr id="18" name="Rounded Rectangle 17"/>
-          <p:cNvSpPr/>
-          <p:nvPr/>
-        </p:nvSpPr>
-        <p:spPr>
-          <a:xfrm>
-            <a:off x="1847850" y="2305050"/>
-            <a:ext cx="8877300" cy="1219200"/>
+              <a:t>L3</a:t>
+            </a:r>
+          </a:p>
+        </p:txBody>
+      </p:sp>
+      <p:sp>
+        <p:nvSpPr>
+          <p:cNvPr id="37" name="Rounded Rectangle 36"/>
+          <p:cNvSpPr/>
+          <p:nvPr/>
+        </p:nvSpPr>
+        <p:spPr>
+          <a:xfrm>
+            <a:off x="1905000" y="3733800"/>
+            <a:ext cx="2819400" cy="1143000"/>
           </a:xfrm>
           <a:prstGeom prst="roundRect">
             <a:avLst>
@@ -20766,7 +21543,53 @@
             </a:avLst>
           </a:prstGeom>
           <a:solidFill>
-            <a:srgbClr val="F1F5F9"/>
+            <a:srgbClr val="FFFFFF"/>
+          </a:solidFill>
+          <a:ln w="12700">
+            <a:solidFill>
+              <a:srgbClr val="8B5CF6"/>
+            </a:solidFill>
+          </a:ln>
+          <a:effectLst/>
+        </p:spPr>
+        <p:style>
+          <a:lnRef idx="1">
+            <a:schemeClr val="accent1"/>
+          </a:lnRef>
+          <a:fillRef idx="3">
+            <a:schemeClr val="accent1"/>
+          </a:fillRef>
+          <a:effectRef idx="2">
+            <a:schemeClr val="accent1"/>
+          </a:effectRef>
+          <a:fontRef idx="minor">
+            <a:schemeClr val="lt1"/>
+          </a:fontRef>
+        </p:style>
+        <p:txBody>
+          <a:bodyPr rtlCol="0" anchor="ctr"/>
+          <a:lstStyle/>
+          <a:p>
+            <a:pPr algn="ctr"/>
+          </a:p>
+        </p:txBody>
+      </p:sp>
+      <p:sp>
+        <p:nvSpPr>
+          <p:cNvPr id="38" name="Rectangle 37"/>
+          <p:cNvSpPr/>
+          <p:nvPr/>
+        </p:nvSpPr>
+        <p:spPr>
+          <a:xfrm>
+            <a:off x="1905000" y="3733800"/>
+            <a:ext cx="47625" cy="1143000"/>
+          </a:xfrm>
+          <a:prstGeom prst="rect">
+            <a:avLst/>
+          </a:prstGeom>
+          <a:solidFill>
+            <a:srgbClr val="8B5CF6"/>
           </a:solidFill>
           <a:ln>
             <a:noFill/>
@@ -20797,13 +21620,52 @@
       </p:sp>
       <p:sp>
         <p:nvSpPr>
-          <p:cNvPr id="19" name="Rounded Rectangle 18"/>
-          <p:cNvSpPr/>
-          <p:nvPr/>
-        </p:nvSpPr>
-        <p:spPr>
-          <a:xfrm>
-            <a:off x="1905000" y="2343150"/>
+          <p:cNvPr id="39" name="TextBox 38"/>
+          <p:cNvSpPr txBox="1"/>
+          <p:nvPr/>
+        </p:nvSpPr>
+        <p:spPr>
+          <a:xfrm>
+            <a:off x="2057400" y="3733800"/>
+            <a:ext cx="2552700" cy="1143000"/>
+          </a:xfrm>
+          <a:prstGeom prst="rect">
+            <a:avLst/>
+          </a:prstGeom>
+          <a:noFill/>
+        </p:spPr>
+        <p:txBody>
+          <a:bodyPr wrap="none" anchor="ctr">
+            <a:spAutoFit/>
+          </a:bodyPr>
+          <a:lstStyle/>
+          <a:p>
+            <a:pPr algn="l">
+              <a:lnSpc>
+                <a:spcPct val="115000"/>
+              </a:lnSpc>
+            </a:pPr>
+            <a:r>
+              <a:rPr sz="1300" b="1">
+                <a:solidFill>
+                  <a:srgbClr val="0B1D3A"/>
+                </a:solidFill>
+                <a:latin typeface="PingFang SC"/>
+              </a:rPr>
+              <a:t>网络:域名白名单</a:t>
+            </a:r>
+          </a:p>
+        </p:txBody>
+      </p:sp>
+      <p:sp>
+        <p:nvSpPr>
+          <p:cNvPr id="40" name="Rounded Rectangle 39"/>
+          <p:cNvSpPr/>
+          <p:nvPr/>
+        </p:nvSpPr>
+        <p:spPr>
+          <a:xfrm>
+            <a:off x="4876800" y="3733800"/>
             <a:ext cx="2819400" cy="1143000"/>
           </a:xfrm>
           <a:prstGeom prst="roundRect">
@@ -20816,7 +21678,7 @@
           </a:solidFill>
           <a:ln w="12700">
             <a:solidFill>
-              <a:srgbClr val="14B8A6"/>
+              <a:srgbClr val="8B5CF6"/>
             </a:solidFill>
           </a:ln>
           <a:effectLst/>
@@ -20845,20 +21707,20 @@
       </p:sp>
       <p:sp>
         <p:nvSpPr>
-          <p:cNvPr id="20" name="Rectangle 19"/>
-          <p:cNvSpPr/>
-          <p:nvPr/>
-        </p:nvSpPr>
-        <p:spPr>
-          <a:xfrm>
-            <a:off x="1905000" y="2343150"/>
+          <p:cNvPr id="41" name="Rectangle 40"/>
+          <p:cNvSpPr/>
+          <p:nvPr/>
+        </p:nvSpPr>
+        <p:spPr>
+          <a:xfrm>
+            <a:off x="4876800" y="3733800"/>
             <a:ext cx="47625" cy="1143000"/>
           </a:xfrm>
           <a:prstGeom prst="rect">
             <a:avLst/>
           </a:prstGeom>
           <a:solidFill>
-            <a:srgbClr val="14B8A6"/>
+            <a:srgbClr val="8B5CF6"/>
           </a:solidFill>
           <a:ln>
             <a:noFill/>
@@ -20889,14 +21751,14 @@
       </p:sp>
       <p:sp>
         <p:nvSpPr>
-          <p:cNvPr id="21" name="TextBox 20"/>
+          <p:cNvPr id="42" name="TextBox 41"/>
           <p:cNvSpPr txBox="1"/>
           <p:nvPr/>
         </p:nvSpPr>
         <p:spPr>
           <a:xfrm>
-            <a:off x="2038350" y="2343150"/>
-            <a:ext cx="2590800" cy="1143000"/>
+            <a:off x="5029200" y="3733800"/>
+            <a:ext cx="2552700" cy="1143000"/>
           </a:xfrm>
           <a:prstGeom prst="rect">
             <a:avLst/>
@@ -20904,37 +21766,37 @@
           <a:noFill/>
         </p:spPr>
         <p:txBody>
-          <a:bodyPr wrap="square" anchor="ctr">
+          <a:bodyPr wrap="none" anchor="ctr">
             <a:spAutoFit/>
           </a:bodyPr>
           <a:lstStyle/>
           <a:p>
             <a:pPr algn="l">
               <a:lnSpc>
-                <a:spcPct val="100000"/>
+                <a:spcPct val="115000"/>
               </a:lnSpc>
             </a:pPr>
             <a:r>
-              <a:rPr sz="1200" b="1">
-                <a:solidFill>
-                  <a:srgbClr val="475569"/>
+              <a:rPr sz="1300" b="1">
+                <a:solidFill>
+                  <a:srgbClr val="0B1D3A"/>
                 </a:solidFill>
                 <a:latin typeface="PingFang SC"/>
               </a:rPr>
-              <a:t>Shell:命令白名单</a:t>
-            </a:r>
-          </a:p>
-        </p:txBody>
-      </p:sp>
-      <p:sp>
-        <p:nvSpPr>
-          <p:cNvPr id="22" name="Rounded Rectangle 21"/>
-          <p:cNvSpPr/>
-          <p:nvPr/>
-        </p:nvSpPr>
-        <p:spPr>
-          <a:xfrm>
-            <a:off x="4876800" y="2343150"/>
+              <a:t>内网按需</a:t>
+            </a:r>
+          </a:p>
+        </p:txBody>
+      </p:sp>
+      <p:sp>
+        <p:nvSpPr>
+          <p:cNvPr id="43" name="Rounded Rectangle 42"/>
+          <p:cNvSpPr/>
+          <p:nvPr/>
+        </p:nvSpPr>
+        <p:spPr>
+          <a:xfrm>
+            <a:off x="7848600" y="3733800"/>
             <a:ext cx="2819400" cy="1143000"/>
           </a:xfrm>
           <a:prstGeom prst="roundRect">
@@ -20947,7 +21809,7 @@
           </a:solidFill>
           <a:ln w="12700">
             <a:solidFill>
-              <a:srgbClr val="14B8A6"/>
+              <a:srgbClr val="8B5CF6"/>
             </a:solidFill>
           </a:ln>
           <a:effectLst/>
@@ -20976,20 +21838,20 @@
       </p:sp>
       <p:sp>
         <p:nvSpPr>
-          <p:cNvPr id="23" name="Rectangle 22"/>
-          <p:cNvSpPr/>
-          <p:nvPr/>
-        </p:nvSpPr>
-        <p:spPr>
-          <a:xfrm>
-            <a:off x="4876800" y="2343150"/>
+          <p:cNvPr id="44" name="Rectangle 43"/>
+          <p:cNvSpPr/>
+          <p:nvPr/>
+        </p:nvSpPr>
+        <p:spPr>
+          <a:xfrm>
+            <a:off x="7848600" y="3733800"/>
             <a:ext cx="47625" cy="1143000"/>
           </a:xfrm>
           <a:prstGeom prst="rect">
             <a:avLst/>
           </a:prstGeom>
           <a:solidFill>
-            <a:srgbClr val="14B8A6"/>
+            <a:srgbClr val="8B5CF6"/>
           </a:solidFill>
           <a:ln>
             <a:noFill/>
@@ -21020,14 +21882,14 @@
       </p:sp>
       <p:sp>
         <p:nvSpPr>
-          <p:cNvPr id="24" name="TextBox 23"/>
+          <p:cNvPr id="45" name="TextBox 44"/>
           <p:cNvSpPr txBox="1"/>
           <p:nvPr/>
         </p:nvSpPr>
         <p:spPr>
           <a:xfrm>
-            <a:off x="5010150" y="2343150"/>
-            <a:ext cx="2590800" cy="1143000"/>
+            <a:off x="8001000" y="3733800"/>
+            <a:ext cx="2552700" cy="1143000"/>
           </a:xfrm>
           <a:prstGeom prst="rect">
             <a:avLst/>
@@ -21035,708 +21897,20 @@
           <a:noFill/>
         </p:spPr>
         <p:txBody>
-          <a:bodyPr wrap="square" anchor="ctr">
+          <a:bodyPr wrap="none" anchor="ctr">
             <a:spAutoFit/>
           </a:bodyPr>
           <a:lstStyle/>
           <a:p>
             <a:pPr algn="l">
               <a:lnSpc>
-                <a:spcPct val="100000"/>
+                <a:spcPct val="115000"/>
               </a:lnSpc>
             </a:pPr>
             <a:r>
-              <a:rPr sz="1200" b="1">
-                <a:solidFill>
-                  <a:srgbClr val="475569"/>
-                </a:solidFill>
-                <a:latin typeface="PingFang SC"/>
-              </a:rPr>
-              <a:t>危险模式硬拦截</a:t>
-            </a:r>
-          </a:p>
-        </p:txBody>
-      </p:sp>
-      <p:sp>
-        <p:nvSpPr>
-          <p:cNvPr id="25" name="Rounded Rectangle 24"/>
-          <p:cNvSpPr/>
-          <p:nvPr/>
-        </p:nvSpPr>
-        <p:spPr>
-          <a:xfrm>
-            <a:off x="7848600" y="2343150"/>
-            <a:ext cx="2819400" cy="1143000"/>
-          </a:xfrm>
-          <a:prstGeom prst="roundRect">
-            <a:avLst>
-              <a:gd name="adj" fmla="val 8000"/>
-            </a:avLst>
-          </a:prstGeom>
-          <a:solidFill>
-            <a:srgbClr val="FFFFFF"/>
-          </a:solidFill>
-          <a:ln w="12700">
-            <a:solidFill>
-              <a:srgbClr val="14B8A6"/>
-            </a:solidFill>
-          </a:ln>
-          <a:effectLst/>
-        </p:spPr>
-        <p:style>
-          <a:lnRef idx="1">
-            <a:schemeClr val="accent1"/>
-          </a:lnRef>
-          <a:fillRef idx="3">
-            <a:schemeClr val="accent1"/>
-          </a:fillRef>
-          <a:effectRef idx="2">
-            <a:schemeClr val="accent1"/>
-          </a:effectRef>
-          <a:fontRef idx="minor">
-            <a:schemeClr val="lt1"/>
-          </a:fontRef>
-        </p:style>
-        <p:txBody>
-          <a:bodyPr rtlCol="0" anchor="ctr"/>
-          <a:lstStyle/>
-          <a:p>
-            <a:pPr algn="ctr"/>
-          </a:p>
-        </p:txBody>
-      </p:sp>
-      <p:sp>
-        <p:nvSpPr>
-          <p:cNvPr id="26" name="Rectangle 25"/>
-          <p:cNvSpPr/>
-          <p:nvPr/>
-        </p:nvSpPr>
-        <p:spPr>
-          <a:xfrm>
-            <a:off x="7848600" y="2343150"/>
-            <a:ext cx="47625" cy="1143000"/>
-          </a:xfrm>
-          <a:prstGeom prst="rect">
-            <a:avLst/>
-          </a:prstGeom>
-          <a:solidFill>
-            <a:srgbClr val="14B8A6"/>
-          </a:solidFill>
-          <a:ln>
-            <a:noFill/>
-          </a:ln>
-          <a:effectLst/>
-        </p:spPr>
-        <p:style>
-          <a:lnRef idx="1">
-            <a:schemeClr val="accent1"/>
-          </a:lnRef>
-          <a:fillRef idx="3">
-            <a:schemeClr val="accent1"/>
-          </a:fillRef>
-          <a:effectRef idx="2">
-            <a:schemeClr val="accent1"/>
-          </a:effectRef>
-          <a:fontRef idx="minor">
-            <a:schemeClr val="lt1"/>
-          </a:fontRef>
-        </p:style>
-        <p:txBody>
-          <a:bodyPr rtlCol="0" anchor="ctr"/>
-          <a:lstStyle/>
-          <a:p>
-            <a:pPr algn="ctr"/>
-          </a:p>
-        </p:txBody>
-      </p:sp>
-      <p:sp>
-        <p:nvSpPr>
-          <p:cNvPr id="27" name="TextBox 26"/>
-          <p:cNvSpPr txBox="1"/>
-          <p:nvPr/>
-        </p:nvSpPr>
-        <p:spPr>
-          <a:xfrm>
-            <a:off x="7981950" y="2343150"/>
-            <a:ext cx="2590800" cy="1143000"/>
-          </a:xfrm>
-          <a:prstGeom prst="rect">
-            <a:avLst/>
-          </a:prstGeom>
-          <a:noFill/>
-        </p:spPr>
-        <p:txBody>
-          <a:bodyPr wrap="square" anchor="ctr">
-            <a:spAutoFit/>
-          </a:bodyPr>
-          <a:lstStyle/>
-          <a:p>
-            <a:pPr algn="l">
-              <a:lnSpc>
-                <a:spcPct val="100000"/>
-              </a:lnSpc>
-            </a:pPr>
-            <a:r>
-              <a:rPr sz="1200" b="1">
-                <a:solidFill>
-                  <a:srgbClr val="475569"/>
-                </a:solidFill>
-                <a:latin typeface="PingFang SC"/>
-              </a:rPr>
-              <a:t>禁用头部(sudo/dd)</a:t>
-            </a:r>
-          </a:p>
-        </p:txBody>
-      </p:sp>
-      <p:cxnSp>
-        <p:nvCxnSpPr>
-          <p:cNvPr id="28" name="Connector 27"/>
-          <p:cNvCxnSpPr/>
-          <p:nvPr/>
-        </p:nvCxnSpPr>
-        <p:spPr>
-          <a:xfrm>
-            <a:off x="6096000" y="3543300"/>
-            <a:ext cx="0" cy="152400"/>
-          </a:xfrm>
-          <a:prstGeom prst="line">
-            <a:avLst/>
-          </a:prstGeom>
-          <a:ln w="15240">
-            <a:solidFill>
-              <a:srgbClr val="94A3B8"/>
-            </a:solidFill>
-          </a:ln>
-        </p:spPr>
-        <p:style>
-          <a:lnRef idx="2">
-            <a:schemeClr val="accent1"/>
-          </a:lnRef>
-          <a:fillRef idx="0">
-            <a:schemeClr val="accent1"/>
-          </a:fillRef>
-          <a:effectRef idx="1">
-            <a:schemeClr val="accent1"/>
-          </a:effectRef>
-          <a:fontRef idx="minor">
-            <a:schemeClr val="tx1"/>
-          </a:fontRef>
-        </p:style>
-      </p:cxnSp>
-      <p:sp>
-        <p:nvSpPr>
-          <p:cNvPr id="29" name="Isosceles Triangle 28"/>
-          <p:cNvSpPr/>
-          <p:nvPr/>
-        </p:nvSpPr>
-        <p:spPr>
-          <a:xfrm rot="10800000">
-            <a:off x="6053138" y="3609976"/>
-            <a:ext cx="85725" cy="85725"/>
-          </a:xfrm>
-          <a:prstGeom prst="triangle">
-            <a:avLst/>
-          </a:prstGeom>
-          <a:solidFill>
-            <a:srgbClr val="94A3B8"/>
-          </a:solidFill>
-          <a:ln>
-            <a:noFill/>
-          </a:ln>
-          <a:effectLst/>
-        </p:spPr>
-        <p:style>
-          <a:lnRef idx="1">
-            <a:schemeClr val="accent1"/>
-          </a:lnRef>
-          <a:fillRef idx="3">
-            <a:schemeClr val="accent1"/>
-          </a:fillRef>
-          <a:effectRef idx="2">
-            <a:schemeClr val="accent1"/>
-          </a:effectRef>
-          <a:fontRef idx="minor">
-            <a:schemeClr val="lt1"/>
-          </a:fontRef>
-        </p:style>
-        <p:txBody>
-          <a:bodyPr rtlCol="0" anchor="ctr"/>
-          <a:lstStyle/>
-          <a:p>
-            <a:pPr algn="ctr"/>
-          </a:p>
-        </p:txBody>
-      </p:sp>
-      <p:sp>
-        <p:nvSpPr>
-          <p:cNvPr id="30" name="TextBox 29"/>
-          <p:cNvSpPr txBox="1"/>
-          <p:nvPr/>
-        </p:nvSpPr>
-        <p:spPr>
-          <a:xfrm>
-            <a:off x="6248400" y="3486150"/>
-            <a:ext cx="2095500" cy="247650"/>
-          </a:xfrm>
-          <a:prstGeom prst="rect">
-            <a:avLst/>
-          </a:prstGeom>
-          <a:noFill/>
-        </p:spPr>
-        <p:txBody>
-          <a:bodyPr wrap="square" anchor="ctr">
-            <a:spAutoFit/>
-          </a:bodyPr>
-          <a:lstStyle/>
-          <a:p>
-            <a:pPr algn="l">
-              <a:lnSpc>
-                <a:spcPct val="100000"/>
-              </a:lnSpc>
-            </a:pPr>
-            <a:r>
-              <a:rPr sz="1000" b="0">
-                <a:solidFill>
-                  <a:srgbClr val="94A3B8"/>
-                </a:solidFill>
-                <a:latin typeface="PingFang SC"/>
-              </a:rPr>
-              <a:t>校验</a:t>
-            </a:r>
-          </a:p>
-        </p:txBody>
-      </p:sp>
-      <p:sp>
-        <p:nvSpPr>
-          <p:cNvPr id="31" name="Rounded Rectangle 30"/>
-          <p:cNvSpPr/>
-          <p:nvPr/>
-        </p:nvSpPr>
-        <p:spPr>
-          <a:xfrm>
-            <a:off x="1847850" y="3695700"/>
-            <a:ext cx="8877300" cy="1219200"/>
-          </a:xfrm>
-          <a:prstGeom prst="roundRect">
-            <a:avLst>
-              <a:gd name="adj" fmla="val 8000"/>
-            </a:avLst>
-          </a:prstGeom>
-          <a:solidFill>
-            <a:srgbClr val="F1F5F9"/>
-          </a:solidFill>
-          <a:ln>
-            <a:noFill/>
-          </a:ln>
-          <a:effectLst/>
-        </p:spPr>
-        <p:style>
-          <a:lnRef idx="1">
-            <a:schemeClr val="accent1"/>
-          </a:lnRef>
-          <a:fillRef idx="3">
-            <a:schemeClr val="accent1"/>
-          </a:fillRef>
-          <a:effectRef idx="2">
-            <a:schemeClr val="accent1"/>
-          </a:effectRef>
-          <a:fontRef idx="minor">
-            <a:schemeClr val="lt1"/>
-          </a:fontRef>
-        </p:style>
-        <p:txBody>
-          <a:bodyPr rtlCol="0" anchor="ctr"/>
-          <a:lstStyle/>
-          <a:p>
-            <a:pPr algn="ctr"/>
-          </a:p>
-        </p:txBody>
-      </p:sp>
-      <p:sp>
-        <p:nvSpPr>
-          <p:cNvPr id="32" name="Rounded Rectangle 31"/>
-          <p:cNvSpPr/>
-          <p:nvPr/>
-        </p:nvSpPr>
-        <p:spPr>
-          <a:xfrm>
-            <a:off x="1905000" y="3733800"/>
-            <a:ext cx="2819400" cy="1143000"/>
-          </a:xfrm>
-          <a:prstGeom prst="roundRect">
-            <a:avLst>
-              <a:gd name="adj" fmla="val 8000"/>
-            </a:avLst>
-          </a:prstGeom>
-          <a:solidFill>
-            <a:srgbClr val="FFFFFF"/>
-          </a:solidFill>
-          <a:ln w="12700">
-            <a:solidFill>
-              <a:srgbClr val="8B5CF6"/>
-            </a:solidFill>
-          </a:ln>
-          <a:effectLst/>
-        </p:spPr>
-        <p:style>
-          <a:lnRef idx="1">
-            <a:schemeClr val="accent1"/>
-          </a:lnRef>
-          <a:fillRef idx="3">
-            <a:schemeClr val="accent1"/>
-          </a:fillRef>
-          <a:effectRef idx="2">
-            <a:schemeClr val="accent1"/>
-          </a:effectRef>
-          <a:fontRef idx="minor">
-            <a:schemeClr val="lt1"/>
-          </a:fontRef>
-        </p:style>
-        <p:txBody>
-          <a:bodyPr rtlCol="0" anchor="ctr"/>
-          <a:lstStyle/>
-          <a:p>
-            <a:pPr algn="ctr"/>
-          </a:p>
-        </p:txBody>
-      </p:sp>
-      <p:sp>
-        <p:nvSpPr>
-          <p:cNvPr id="33" name="Rectangle 32"/>
-          <p:cNvSpPr/>
-          <p:nvPr/>
-        </p:nvSpPr>
-        <p:spPr>
-          <a:xfrm>
-            <a:off x="1905000" y="3733800"/>
-            <a:ext cx="47625" cy="1143000"/>
-          </a:xfrm>
-          <a:prstGeom prst="rect">
-            <a:avLst/>
-          </a:prstGeom>
-          <a:solidFill>
-            <a:srgbClr val="8B5CF6"/>
-          </a:solidFill>
-          <a:ln>
-            <a:noFill/>
-          </a:ln>
-          <a:effectLst/>
-        </p:spPr>
-        <p:style>
-          <a:lnRef idx="1">
-            <a:schemeClr val="accent1"/>
-          </a:lnRef>
-          <a:fillRef idx="3">
-            <a:schemeClr val="accent1"/>
-          </a:fillRef>
-          <a:effectRef idx="2">
-            <a:schemeClr val="accent1"/>
-          </a:effectRef>
-          <a:fontRef idx="minor">
-            <a:schemeClr val="lt1"/>
-          </a:fontRef>
-        </p:style>
-        <p:txBody>
-          <a:bodyPr rtlCol="0" anchor="ctr"/>
-          <a:lstStyle/>
-          <a:p>
-            <a:pPr algn="ctr"/>
-          </a:p>
-        </p:txBody>
-      </p:sp>
-      <p:sp>
-        <p:nvSpPr>
-          <p:cNvPr id="34" name="TextBox 33"/>
-          <p:cNvSpPr txBox="1"/>
-          <p:nvPr/>
-        </p:nvSpPr>
-        <p:spPr>
-          <a:xfrm>
-            <a:off x="2038350" y="3733800"/>
-            <a:ext cx="2590800" cy="1143000"/>
-          </a:xfrm>
-          <a:prstGeom prst="rect">
-            <a:avLst/>
-          </a:prstGeom>
-          <a:noFill/>
-        </p:spPr>
-        <p:txBody>
-          <a:bodyPr wrap="square" anchor="ctr">
-            <a:spAutoFit/>
-          </a:bodyPr>
-          <a:lstStyle/>
-          <a:p>
-            <a:pPr algn="l">
-              <a:lnSpc>
-                <a:spcPct val="100000"/>
-              </a:lnSpc>
-            </a:pPr>
-            <a:r>
-              <a:rPr sz="1200" b="1">
-                <a:solidFill>
-                  <a:srgbClr val="475569"/>
-                </a:solidFill>
-                <a:latin typeface="PingFang SC"/>
-              </a:rPr>
-              <a:t>网络:域名白名单</a:t>
-            </a:r>
-          </a:p>
-        </p:txBody>
-      </p:sp>
-      <p:sp>
-        <p:nvSpPr>
-          <p:cNvPr id="35" name="Rounded Rectangle 34"/>
-          <p:cNvSpPr/>
-          <p:nvPr/>
-        </p:nvSpPr>
-        <p:spPr>
-          <a:xfrm>
-            <a:off x="4876800" y="3733800"/>
-            <a:ext cx="2819400" cy="1143000"/>
-          </a:xfrm>
-          <a:prstGeom prst="roundRect">
-            <a:avLst>
-              <a:gd name="adj" fmla="val 8000"/>
-            </a:avLst>
-          </a:prstGeom>
-          <a:solidFill>
-            <a:srgbClr val="FFFFFF"/>
-          </a:solidFill>
-          <a:ln w="12700">
-            <a:solidFill>
-              <a:srgbClr val="8B5CF6"/>
-            </a:solidFill>
-          </a:ln>
-          <a:effectLst/>
-        </p:spPr>
-        <p:style>
-          <a:lnRef idx="1">
-            <a:schemeClr val="accent1"/>
-          </a:lnRef>
-          <a:fillRef idx="3">
-            <a:schemeClr val="accent1"/>
-          </a:fillRef>
-          <a:effectRef idx="2">
-            <a:schemeClr val="accent1"/>
-          </a:effectRef>
-          <a:fontRef idx="minor">
-            <a:schemeClr val="lt1"/>
-          </a:fontRef>
-        </p:style>
-        <p:txBody>
-          <a:bodyPr rtlCol="0" anchor="ctr"/>
-          <a:lstStyle/>
-          <a:p>
-            <a:pPr algn="ctr"/>
-          </a:p>
-        </p:txBody>
-      </p:sp>
-      <p:sp>
-        <p:nvSpPr>
-          <p:cNvPr id="36" name="Rectangle 35"/>
-          <p:cNvSpPr/>
-          <p:nvPr/>
-        </p:nvSpPr>
-        <p:spPr>
-          <a:xfrm>
-            <a:off x="4876800" y="3733800"/>
-            <a:ext cx="47625" cy="1143000"/>
-          </a:xfrm>
-          <a:prstGeom prst="rect">
-            <a:avLst/>
-          </a:prstGeom>
-          <a:solidFill>
-            <a:srgbClr val="8B5CF6"/>
-          </a:solidFill>
-          <a:ln>
-            <a:noFill/>
-          </a:ln>
-          <a:effectLst/>
-        </p:spPr>
-        <p:style>
-          <a:lnRef idx="1">
-            <a:schemeClr val="accent1"/>
-          </a:lnRef>
-          <a:fillRef idx="3">
-            <a:schemeClr val="accent1"/>
-          </a:fillRef>
-          <a:effectRef idx="2">
-            <a:schemeClr val="accent1"/>
-          </a:effectRef>
-          <a:fontRef idx="minor">
-            <a:schemeClr val="lt1"/>
-          </a:fontRef>
-        </p:style>
-        <p:txBody>
-          <a:bodyPr rtlCol="0" anchor="ctr"/>
-          <a:lstStyle/>
-          <a:p>
-            <a:pPr algn="ctr"/>
-          </a:p>
-        </p:txBody>
-      </p:sp>
-      <p:sp>
-        <p:nvSpPr>
-          <p:cNvPr id="37" name="TextBox 36"/>
-          <p:cNvSpPr txBox="1"/>
-          <p:nvPr/>
-        </p:nvSpPr>
-        <p:spPr>
-          <a:xfrm>
-            <a:off x="5010150" y="3733800"/>
-            <a:ext cx="2590800" cy="1143000"/>
-          </a:xfrm>
-          <a:prstGeom prst="rect">
-            <a:avLst/>
-          </a:prstGeom>
-          <a:noFill/>
-        </p:spPr>
-        <p:txBody>
-          <a:bodyPr wrap="square" anchor="ctr">
-            <a:spAutoFit/>
-          </a:bodyPr>
-          <a:lstStyle/>
-          <a:p>
-            <a:pPr algn="l">
-              <a:lnSpc>
-                <a:spcPct val="100000"/>
-              </a:lnSpc>
-            </a:pPr>
-            <a:r>
-              <a:rPr sz="1200" b="1">
-                <a:solidFill>
-                  <a:srgbClr val="475569"/>
-                </a:solidFill>
-                <a:latin typeface="PingFang SC"/>
-              </a:rPr>
-              <a:t>内网按需</a:t>
-            </a:r>
-          </a:p>
-        </p:txBody>
-      </p:sp>
-      <p:sp>
-        <p:nvSpPr>
-          <p:cNvPr id="38" name="Rounded Rectangle 37"/>
-          <p:cNvSpPr/>
-          <p:nvPr/>
-        </p:nvSpPr>
-        <p:spPr>
-          <a:xfrm>
-            <a:off x="7848600" y="3733800"/>
-            <a:ext cx="2819400" cy="1143000"/>
-          </a:xfrm>
-          <a:prstGeom prst="roundRect">
-            <a:avLst>
-              <a:gd name="adj" fmla="val 8000"/>
-            </a:avLst>
-          </a:prstGeom>
-          <a:solidFill>
-            <a:srgbClr val="FFFFFF"/>
-          </a:solidFill>
-          <a:ln w="12700">
-            <a:solidFill>
-              <a:srgbClr val="8B5CF6"/>
-            </a:solidFill>
-          </a:ln>
-          <a:effectLst/>
-        </p:spPr>
-        <p:style>
-          <a:lnRef idx="1">
-            <a:schemeClr val="accent1"/>
-          </a:lnRef>
-          <a:fillRef idx="3">
-            <a:schemeClr val="accent1"/>
-          </a:fillRef>
-          <a:effectRef idx="2">
-            <a:schemeClr val="accent1"/>
-          </a:effectRef>
-          <a:fontRef idx="minor">
-            <a:schemeClr val="lt1"/>
-          </a:fontRef>
-        </p:style>
-        <p:txBody>
-          <a:bodyPr rtlCol="0" anchor="ctr"/>
-          <a:lstStyle/>
-          <a:p>
-            <a:pPr algn="ctr"/>
-          </a:p>
-        </p:txBody>
-      </p:sp>
-      <p:sp>
-        <p:nvSpPr>
-          <p:cNvPr id="39" name="Rectangle 38"/>
-          <p:cNvSpPr/>
-          <p:nvPr/>
-        </p:nvSpPr>
-        <p:spPr>
-          <a:xfrm>
-            <a:off x="7848600" y="3733800"/>
-            <a:ext cx="47625" cy="1143000"/>
-          </a:xfrm>
-          <a:prstGeom prst="rect">
-            <a:avLst/>
-          </a:prstGeom>
-          <a:solidFill>
-            <a:srgbClr val="8B5CF6"/>
-          </a:solidFill>
-          <a:ln>
-            <a:noFill/>
-          </a:ln>
-          <a:effectLst/>
-        </p:spPr>
-        <p:style>
-          <a:lnRef idx="1">
-            <a:schemeClr val="accent1"/>
-          </a:lnRef>
-          <a:fillRef idx="3">
-            <a:schemeClr val="accent1"/>
-          </a:fillRef>
-          <a:effectRef idx="2">
-            <a:schemeClr val="accent1"/>
-          </a:effectRef>
-          <a:fontRef idx="minor">
-            <a:schemeClr val="lt1"/>
-          </a:fontRef>
-        </p:style>
-        <p:txBody>
-          <a:bodyPr rtlCol="0" anchor="ctr"/>
-          <a:lstStyle/>
-          <a:p>
-            <a:pPr algn="ctr"/>
-          </a:p>
-        </p:txBody>
-      </p:sp>
-      <p:sp>
-        <p:nvSpPr>
-          <p:cNvPr id="40" name="TextBox 39"/>
-          <p:cNvSpPr txBox="1"/>
-          <p:nvPr/>
-        </p:nvSpPr>
-        <p:spPr>
-          <a:xfrm>
-            <a:off x="7981950" y="3733800"/>
-            <a:ext cx="2590800" cy="1143000"/>
-          </a:xfrm>
-          <a:prstGeom prst="rect">
-            <a:avLst/>
-          </a:prstGeom>
-          <a:noFill/>
-        </p:spPr>
-        <p:txBody>
-          <a:bodyPr wrap="square" anchor="ctr">
-            <a:spAutoFit/>
-          </a:bodyPr>
-          <a:lstStyle/>
-          <a:p>
-            <a:pPr algn="l">
-              <a:lnSpc>
-                <a:spcPct val="100000"/>
-              </a:lnSpc>
-            </a:pPr>
-            <a:r>
-              <a:rPr sz="1200" b="1">
-                <a:solidFill>
-                  <a:srgbClr val="475569"/>
+              <a:rPr sz="1300" b="1">
+                <a:solidFill>
+                  <a:srgbClr val="0B1D3A"/>
                 </a:solidFill>
                 <a:latin typeface="PingFang SC"/>
               </a:rPr>
@@ -21747,7 +21921,7 @@
       </p:sp>
       <p:sp>
         <p:nvSpPr>
-          <p:cNvPr id="41" name="TextBox 40"/>
+          <p:cNvPr id="46" name="TextBox 45"/>
           <p:cNvSpPr txBox="1"/>
           <p:nvPr/>
         </p:nvSpPr>
@@ -21786,7 +21960,7 @@
       </p:sp>
       <p:sp>
         <p:nvSpPr>
-          <p:cNvPr id="42" name="TextBox 41"/>
+          <p:cNvPr id="47" name="TextBox 46"/>
           <p:cNvSpPr txBox="1"/>
           <p:nvPr/>
         </p:nvSpPr>
@@ -24863,21 +25037,391 @@
                 </a:solidFill>
                 <a:latin typeface="PingFang SC"/>
               </a:rPr>
-              <a:t>路径逃逸攻防实测,$ sandbox.check_read("repo/../../etc/passwd");SandboxViolation: read denied (realpath 归一后判定);$ ln -s /etc/passwd evil &amp;&amp; read evil;SandboxViolation: symlink 逃逸被拦;# realpath+resolve 后再判前缀</a:t>
-            </a:r>
-          </a:p>
-        </p:txBody>
-      </p:sp>
-      <p:sp>
-        <p:nvSpPr>
-          <p:cNvPr id="5" name="TextBox 4"/>
+              <a:t>路径逃逸攻防实测</a:t>
+            </a:r>
+          </a:p>
+        </p:txBody>
+      </p:sp>
+      <p:sp>
+        <p:nvSpPr>
+          <p:cNvPr id="5" name="Rounded Rectangle 4"/>
+          <p:cNvSpPr/>
+          <p:nvPr/>
+        </p:nvSpPr>
+        <p:spPr>
+          <a:xfrm>
+            <a:off x="1333500" y="1047750"/>
+            <a:ext cx="9525000" cy="2667000"/>
+          </a:xfrm>
+          <a:prstGeom prst="roundRect">
+            <a:avLst>
+              <a:gd name="adj" fmla="val 8000"/>
+            </a:avLst>
+          </a:prstGeom>
+          <a:solidFill>
+            <a:srgbClr val="0D1117"/>
+          </a:solidFill>
+          <a:ln>
+            <a:noFill/>
+          </a:ln>
+          <a:effectLst/>
+        </p:spPr>
+        <p:style>
+          <a:lnRef idx="1">
+            <a:schemeClr val="accent1"/>
+          </a:lnRef>
+          <a:fillRef idx="3">
+            <a:schemeClr val="accent1"/>
+          </a:fillRef>
+          <a:effectRef idx="2">
+            <a:schemeClr val="accent1"/>
+          </a:effectRef>
+          <a:fontRef idx="minor">
+            <a:schemeClr val="lt1"/>
+          </a:fontRef>
+        </p:style>
+        <p:txBody>
+          <a:bodyPr rtlCol="0" anchor="ctr"/>
+          <a:lstStyle/>
+          <a:p>
+            <a:pPr algn="ctr"/>
+          </a:p>
+        </p:txBody>
+      </p:sp>
+      <p:sp>
+        <p:nvSpPr>
+          <p:cNvPr id="6" name="Rectangle 5"/>
+          <p:cNvSpPr/>
+          <p:nvPr/>
+        </p:nvSpPr>
+        <p:spPr>
+          <a:xfrm>
+            <a:off x="1333500" y="1047750"/>
+            <a:ext cx="9525000" cy="381000"/>
+          </a:xfrm>
+          <a:prstGeom prst="rect">
+            <a:avLst/>
+          </a:prstGeom>
+          <a:solidFill>
+            <a:srgbClr val="1F2937"/>
+          </a:solidFill>
+          <a:ln>
+            <a:noFill/>
+          </a:ln>
+          <a:effectLst/>
+        </p:spPr>
+        <p:style>
+          <a:lnRef idx="1">
+            <a:schemeClr val="accent1"/>
+          </a:lnRef>
+          <a:fillRef idx="3">
+            <a:schemeClr val="accent1"/>
+          </a:fillRef>
+          <a:effectRef idx="2">
+            <a:schemeClr val="accent1"/>
+          </a:effectRef>
+          <a:fontRef idx="minor">
+            <a:schemeClr val="lt1"/>
+          </a:fontRef>
+        </p:style>
+        <p:txBody>
+          <a:bodyPr rtlCol="0" anchor="ctr"/>
+          <a:lstStyle/>
+          <a:p>
+            <a:pPr algn="ctr"/>
+          </a:p>
+        </p:txBody>
+      </p:sp>
+      <p:sp>
+        <p:nvSpPr>
+          <p:cNvPr id="7" name="Rounded Rectangle 6"/>
+          <p:cNvSpPr/>
+          <p:nvPr/>
+        </p:nvSpPr>
+        <p:spPr>
+          <a:xfrm>
+            <a:off x="1504950" y="1181100"/>
+            <a:ext cx="123825" cy="123825"/>
+          </a:xfrm>
+          <a:prstGeom prst="roundRect">
+            <a:avLst>
+              <a:gd name="adj" fmla="val 8000"/>
+            </a:avLst>
+          </a:prstGeom>
+          <a:solidFill>
+            <a:srgbClr val="F87171"/>
+          </a:solidFill>
+          <a:ln>
+            <a:noFill/>
+          </a:ln>
+          <a:effectLst/>
+        </p:spPr>
+        <p:style>
+          <a:lnRef idx="1">
+            <a:schemeClr val="accent1"/>
+          </a:lnRef>
+          <a:fillRef idx="3">
+            <a:schemeClr val="accent1"/>
+          </a:fillRef>
+          <a:effectRef idx="2">
+            <a:schemeClr val="accent1"/>
+          </a:effectRef>
+          <a:fontRef idx="minor">
+            <a:schemeClr val="lt1"/>
+          </a:fontRef>
+        </p:style>
+        <p:txBody>
+          <a:bodyPr rtlCol="0" anchor="ctr"/>
+          <a:lstStyle/>
+          <a:p>
+            <a:pPr algn="ctr"/>
+          </a:p>
+        </p:txBody>
+      </p:sp>
+      <p:sp>
+        <p:nvSpPr>
+          <p:cNvPr id="8" name="Rounded Rectangle 7"/>
+          <p:cNvSpPr/>
+          <p:nvPr/>
+        </p:nvSpPr>
+        <p:spPr>
+          <a:xfrm>
+            <a:off x="1752600" y="1181100"/>
+            <a:ext cx="123825" cy="123825"/>
+          </a:xfrm>
+          <a:prstGeom prst="roundRect">
+            <a:avLst>
+              <a:gd name="adj" fmla="val 8000"/>
+            </a:avLst>
+          </a:prstGeom>
+          <a:solidFill>
+            <a:srgbClr val="F59E0B"/>
+          </a:solidFill>
+          <a:ln>
+            <a:noFill/>
+          </a:ln>
+          <a:effectLst/>
+        </p:spPr>
+        <p:style>
+          <a:lnRef idx="1">
+            <a:schemeClr val="accent1"/>
+          </a:lnRef>
+          <a:fillRef idx="3">
+            <a:schemeClr val="accent1"/>
+          </a:fillRef>
+          <a:effectRef idx="2">
+            <a:schemeClr val="accent1"/>
+          </a:effectRef>
+          <a:fontRef idx="minor">
+            <a:schemeClr val="lt1"/>
+          </a:fontRef>
+        </p:style>
+        <p:txBody>
+          <a:bodyPr rtlCol="0" anchor="ctr"/>
+          <a:lstStyle/>
+          <a:p>
+            <a:pPr algn="ctr"/>
+          </a:p>
+        </p:txBody>
+      </p:sp>
+      <p:sp>
+        <p:nvSpPr>
+          <p:cNvPr id="9" name="Rounded Rectangle 8"/>
+          <p:cNvSpPr/>
+          <p:nvPr/>
+        </p:nvSpPr>
+        <p:spPr>
+          <a:xfrm>
+            <a:off x="2000250" y="1181100"/>
+            <a:ext cx="123825" cy="123825"/>
+          </a:xfrm>
+          <a:prstGeom prst="roundRect">
+            <a:avLst>
+              <a:gd name="adj" fmla="val 8000"/>
+            </a:avLst>
+          </a:prstGeom>
+          <a:solidFill>
+            <a:srgbClr val="34D399"/>
+          </a:solidFill>
+          <a:ln>
+            <a:noFill/>
+          </a:ln>
+          <a:effectLst/>
+        </p:spPr>
+        <p:style>
+          <a:lnRef idx="1">
+            <a:schemeClr val="accent1"/>
+          </a:lnRef>
+          <a:fillRef idx="3">
+            <a:schemeClr val="accent1"/>
+          </a:fillRef>
+          <a:effectRef idx="2">
+            <a:schemeClr val="accent1"/>
+          </a:effectRef>
+          <a:fontRef idx="minor">
+            <a:schemeClr val="lt1"/>
+          </a:fontRef>
+        </p:style>
+        <p:txBody>
+          <a:bodyPr rtlCol="0" anchor="ctr"/>
+          <a:lstStyle/>
+          <a:p>
+            <a:pPr algn="ctr"/>
+          </a:p>
+        </p:txBody>
+      </p:sp>
+      <p:sp>
+        <p:nvSpPr>
+          <p:cNvPr id="10" name="TextBox 9"/>
           <p:cNvSpPr txBox="1"/>
           <p:nvPr/>
         </p:nvSpPr>
         <p:spPr>
           <a:xfrm>
-            <a:off x="9334500" y="0"/>
-            <a:ext cx="2667000" cy="704850"/>
+            <a:off x="2381250" y="1047750"/>
+            <a:ext cx="8286750" cy="381000"/>
+          </a:xfrm>
+          <a:prstGeom prst="rect">
+            <a:avLst/>
+          </a:prstGeom>
+          <a:noFill/>
+        </p:spPr>
+        <p:txBody>
+          <a:bodyPr wrap="square" anchor="ctr">
+            <a:spAutoFit/>
+          </a:bodyPr>
+          <a:lstStyle/>
+          <a:p>
+            <a:pPr algn="l">
+              <a:lnSpc>
+                <a:spcPct val="100000"/>
+              </a:lnSpc>
+            </a:pPr>
+            <a:r>
+              <a:rPr sz="1100" b="0">
+                <a:solidFill>
+                  <a:srgbClr val="94A3B8"/>
+                </a:solidFill>
+                <a:latin typeface="PingFang SC"/>
+              </a:rPr>
+              <a:t>terminal — 平台实测</a:t>
+            </a:r>
+          </a:p>
+        </p:txBody>
+      </p:sp>
+      <p:sp>
+        <p:nvSpPr>
+          <p:cNvPr id="11" name="TextBox 10"/>
+          <p:cNvSpPr txBox="1"/>
+          <p:nvPr/>
+        </p:nvSpPr>
+        <p:spPr>
+          <a:xfrm>
+            <a:off x="1562100" y="1581150"/>
+            <a:ext cx="9067800" cy="2000250"/>
+          </a:xfrm>
+          <a:prstGeom prst="rect">
+            <a:avLst/>
+          </a:prstGeom>
+          <a:noFill/>
+        </p:spPr>
+        <p:txBody>
+          <a:bodyPr wrap="square">
+            <a:spAutoFit/>
+          </a:bodyPr>
+          <a:lstStyle/>
+          <a:p>
+            <a:pPr>
+              <a:lnSpc>
+                <a:spcPct val="115000"/>
+              </a:lnSpc>
+            </a:pPr>
+            <a:r>
+              <a:rPr sz="1300" b="1">
+                <a:solidFill>
+                  <a:srgbClr val="34D399"/>
+                </a:solidFill>
+                <a:latin typeface="Menlo"/>
+              </a:rPr>
+              <a:t>$ sandbox.check_read("repo/../../etc/passwd")</a:t>
+            </a:r>
+          </a:p>
+          <a:p>
+            <a:pPr>
+              <a:lnSpc>
+                <a:spcPct val="115000"/>
+              </a:lnSpc>
+            </a:pPr>
+            <a:r>
+              <a:rPr sz="1300">
+                <a:solidFill>
+                  <a:srgbClr val="CBD5E1"/>
+                </a:solidFill>
+                <a:latin typeface="Menlo"/>
+              </a:rPr>
+              <a:t>SandboxViolation: read denied (realpath 归一后判定)</a:t>
+            </a:r>
+          </a:p>
+          <a:p>
+            <a:pPr>
+              <a:lnSpc>
+                <a:spcPct val="115000"/>
+              </a:lnSpc>
+            </a:pPr>
+            <a:r>
+              <a:rPr sz="1300" b="1">
+                <a:solidFill>
+                  <a:srgbClr val="34D399"/>
+                </a:solidFill>
+                <a:latin typeface="Menlo"/>
+              </a:rPr>
+              <a:t>$ ln -s /etc/passwd evil &amp;&amp; read evil</a:t>
+            </a:r>
+          </a:p>
+          <a:p>
+            <a:pPr>
+              <a:lnSpc>
+                <a:spcPct val="115000"/>
+              </a:lnSpc>
+            </a:pPr>
+            <a:r>
+              <a:rPr sz="1300">
+                <a:solidFill>
+                  <a:srgbClr val="CBD5E1"/>
+                </a:solidFill>
+                <a:latin typeface="Menlo"/>
+              </a:rPr>
+              <a:t>SandboxViolation: symlink 逃逸被拦</a:t>
+            </a:r>
+          </a:p>
+          <a:p>
+            <a:pPr>
+              <a:lnSpc>
+                <a:spcPct val="115000"/>
+              </a:lnSpc>
+            </a:pPr>
+            <a:r>
+              <a:rPr sz="1300">
+                <a:solidFill>
+                  <a:srgbClr val="94A3B8"/>
+                </a:solidFill>
+                <a:latin typeface="Menlo"/>
+              </a:rPr>
+              <a:t># realpath+resolve 后再判前缀</a:t>
+            </a:r>
+          </a:p>
+        </p:txBody>
+      </p:sp>
+      <p:sp>
+        <p:nvSpPr>
+          <p:cNvPr id="12" name="TextBox 11"/>
+          <p:cNvSpPr txBox="1"/>
+          <p:nvPr/>
+        </p:nvSpPr>
+        <p:spPr>
+          <a:xfrm>
+            <a:off x="10287000" y="6534150"/>
+            <a:ext cx="1619250" cy="266700"/>
           </a:xfrm>
           <a:prstGeom prst="rect">
             <a:avLst/>
@@ -24896,351 +25440,6 @@
               </a:lnSpc>
             </a:pPr>
             <a:r>
-              <a:rPr sz="1100" b="0">
-                <a:solidFill>
-                  <a:srgbClr val="94A3B8"/>
-                </a:solidFill>
-                <a:latin typeface="PingFang SC"/>
-              </a:rPr>
-              <a:t>两连攻击全拦</a:t>
-            </a:r>
-          </a:p>
-        </p:txBody>
-      </p:sp>
-      <p:sp>
-        <p:nvSpPr>
-          <p:cNvPr id="6" name="Rounded Rectangle 5"/>
-          <p:cNvSpPr/>
-          <p:nvPr/>
-        </p:nvSpPr>
-        <p:spPr>
-          <a:xfrm>
-            <a:off x="1333500" y="952500"/>
-            <a:ext cx="9525000" cy="5048250"/>
-          </a:xfrm>
-          <a:prstGeom prst="roundRect">
-            <a:avLst>
-              <a:gd name="adj" fmla="val 8000"/>
-            </a:avLst>
-          </a:prstGeom>
-          <a:solidFill>
-            <a:srgbClr val="0D1117"/>
-          </a:solidFill>
-          <a:ln>
-            <a:noFill/>
-          </a:ln>
-          <a:effectLst/>
-        </p:spPr>
-        <p:style>
-          <a:lnRef idx="1">
-            <a:schemeClr val="accent1"/>
-          </a:lnRef>
-          <a:fillRef idx="3">
-            <a:schemeClr val="accent1"/>
-          </a:fillRef>
-          <a:effectRef idx="2">
-            <a:schemeClr val="accent1"/>
-          </a:effectRef>
-          <a:fontRef idx="minor">
-            <a:schemeClr val="lt1"/>
-          </a:fontRef>
-        </p:style>
-        <p:txBody>
-          <a:bodyPr rtlCol="0" anchor="ctr"/>
-          <a:lstStyle/>
-          <a:p>
-            <a:pPr algn="ctr"/>
-          </a:p>
-        </p:txBody>
-      </p:sp>
-      <p:sp>
-        <p:nvSpPr>
-          <p:cNvPr id="7" name="Rectangle 6"/>
-          <p:cNvSpPr/>
-          <p:nvPr/>
-        </p:nvSpPr>
-        <p:spPr>
-          <a:xfrm>
-            <a:off x="1333500" y="952500"/>
-            <a:ext cx="9525000" cy="381000"/>
-          </a:xfrm>
-          <a:prstGeom prst="rect">
-            <a:avLst/>
-          </a:prstGeom>
-          <a:solidFill>
-            <a:srgbClr val="1F2937"/>
-          </a:solidFill>
-          <a:ln>
-            <a:noFill/>
-          </a:ln>
-          <a:effectLst/>
-        </p:spPr>
-        <p:style>
-          <a:lnRef idx="1">
-            <a:schemeClr val="accent1"/>
-          </a:lnRef>
-          <a:fillRef idx="3">
-            <a:schemeClr val="accent1"/>
-          </a:fillRef>
-          <a:effectRef idx="2">
-            <a:schemeClr val="accent1"/>
-          </a:effectRef>
-          <a:fontRef idx="minor">
-            <a:schemeClr val="lt1"/>
-          </a:fontRef>
-        </p:style>
-        <p:txBody>
-          <a:bodyPr rtlCol="0" anchor="ctr"/>
-          <a:lstStyle/>
-          <a:p>
-            <a:pPr algn="ctr"/>
-          </a:p>
-        </p:txBody>
-      </p:sp>
-      <p:sp>
-        <p:nvSpPr>
-          <p:cNvPr id="8" name="Rounded Rectangle 7"/>
-          <p:cNvSpPr/>
-          <p:nvPr/>
-        </p:nvSpPr>
-        <p:spPr>
-          <a:xfrm>
-            <a:off x="1504950" y="1085850"/>
-            <a:ext cx="123825" cy="123825"/>
-          </a:xfrm>
-          <a:prstGeom prst="roundRect">
-            <a:avLst>
-              <a:gd name="adj" fmla="val 8000"/>
-            </a:avLst>
-          </a:prstGeom>
-          <a:solidFill>
-            <a:srgbClr val="F87171"/>
-          </a:solidFill>
-          <a:ln>
-            <a:noFill/>
-          </a:ln>
-          <a:effectLst/>
-        </p:spPr>
-        <p:style>
-          <a:lnRef idx="1">
-            <a:schemeClr val="accent1"/>
-          </a:lnRef>
-          <a:fillRef idx="3">
-            <a:schemeClr val="accent1"/>
-          </a:fillRef>
-          <a:effectRef idx="2">
-            <a:schemeClr val="accent1"/>
-          </a:effectRef>
-          <a:fontRef idx="minor">
-            <a:schemeClr val="lt1"/>
-          </a:fontRef>
-        </p:style>
-        <p:txBody>
-          <a:bodyPr rtlCol="0" anchor="ctr"/>
-          <a:lstStyle/>
-          <a:p>
-            <a:pPr algn="ctr"/>
-          </a:p>
-        </p:txBody>
-      </p:sp>
-      <p:sp>
-        <p:nvSpPr>
-          <p:cNvPr id="9" name="Rounded Rectangle 8"/>
-          <p:cNvSpPr/>
-          <p:nvPr/>
-        </p:nvSpPr>
-        <p:spPr>
-          <a:xfrm>
-            <a:off x="1752600" y="1085850"/>
-            <a:ext cx="123825" cy="123825"/>
-          </a:xfrm>
-          <a:prstGeom prst="roundRect">
-            <a:avLst>
-              <a:gd name="adj" fmla="val 8000"/>
-            </a:avLst>
-          </a:prstGeom>
-          <a:solidFill>
-            <a:srgbClr val="F59E0B"/>
-          </a:solidFill>
-          <a:ln>
-            <a:noFill/>
-          </a:ln>
-          <a:effectLst/>
-        </p:spPr>
-        <p:style>
-          <a:lnRef idx="1">
-            <a:schemeClr val="accent1"/>
-          </a:lnRef>
-          <a:fillRef idx="3">
-            <a:schemeClr val="accent1"/>
-          </a:fillRef>
-          <a:effectRef idx="2">
-            <a:schemeClr val="accent1"/>
-          </a:effectRef>
-          <a:fontRef idx="minor">
-            <a:schemeClr val="lt1"/>
-          </a:fontRef>
-        </p:style>
-        <p:txBody>
-          <a:bodyPr rtlCol="0" anchor="ctr"/>
-          <a:lstStyle/>
-          <a:p>
-            <a:pPr algn="ctr"/>
-          </a:p>
-        </p:txBody>
-      </p:sp>
-      <p:sp>
-        <p:nvSpPr>
-          <p:cNvPr id="10" name="Rounded Rectangle 9"/>
-          <p:cNvSpPr/>
-          <p:nvPr/>
-        </p:nvSpPr>
-        <p:spPr>
-          <a:xfrm>
-            <a:off x="2000250" y="1085850"/>
-            <a:ext cx="123825" cy="123825"/>
-          </a:xfrm>
-          <a:prstGeom prst="roundRect">
-            <a:avLst>
-              <a:gd name="adj" fmla="val 8000"/>
-            </a:avLst>
-          </a:prstGeom>
-          <a:solidFill>
-            <a:srgbClr val="34D399"/>
-          </a:solidFill>
-          <a:ln>
-            <a:noFill/>
-          </a:ln>
-          <a:effectLst/>
-        </p:spPr>
-        <p:style>
-          <a:lnRef idx="1">
-            <a:schemeClr val="accent1"/>
-          </a:lnRef>
-          <a:fillRef idx="3">
-            <a:schemeClr val="accent1"/>
-          </a:fillRef>
-          <a:effectRef idx="2">
-            <a:schemeClr val="accent1"/>
-          </a:effectRef>
-          <a:fontRef idx="minor">
-            <a:schemeClr val="lt1"/>
-          </a:fontRef>
-        </p:style>
-        <p:txBody>
-          <a:bodyPr rtlCol="0" anchor="ctr"/>
-          <a:lstStyle/>
-          <a:p>
-            <a:pPr algn="ctr"/>
-          </a:p>
-        </p:txBody>
-      </p:sp>
-      <p:sp>
-        <p:nvSpPr>
-          <p:cNvPr id="11" name="TextBox 10"/>
-          <p:cNvSpPr txBox="1"/>
-          <p:nvPr/>
-        </p:nvSpPr>
-        <p:spPr>
-          <a:xfrm>
-            <a:off x="2381250" y="952500"/>
-            <a:ext cx="8286750" cy="381000"/>
-          </a:xfrm>
-          <a:prstGeom prst="rect">
-            <a:avLst/>
-          </a:prstGeom>
-          <a:noFill/>
-        </p:spPr>
-        <p:txBody>
-          <a:bodyPr wrap="square" anchor="ctr">
-            <a:spAutoFit/>
-          </a:bodyPr>
-          <a:lstStyle/>
-          <a:p>
-            <a:pPr algn="l">
-              <a:lnSpc>
-                <a:spcPct val="100000"/>
-              </a:lnSpc>
-            </a:pPr>
-            <a:r>
-              <a:rPr sz="1100" b="0">
-                <a:solidFill>
-                  <a:srgbClr val="94A3B8"/>
-                </a:solidFill>
-                <a:latin typeface="PingFang SC"/>
-              </a:rPr>
-              <a:t>terminal — 平台实测</a:t>
-            </a:r>
-          </a:p>
-        </p:txBody>
-      </p:sp>
-      <p:sp>
-        <p:nvSpPr>
-          <p:cNvPr id="12" name="TextBox 11"/>
-          <p:cNvSpPr txBox="1"/>
-          <p:nvPr/>
-        </p:nvSpPr>
-        <p:spPr>
-          <a:xfrm>
-            <a:off x="1562100" y="1485900"/>
-            <a:ext cx="9067800" cy="4381500"/>
-          </a:xfrm>
-          <a:prstGeom prst="rect">
-            <a:avLst/>
-          </a:prstGeom>
-          <a:noFill/>
-        </p:spPr>
-        <p:txBody>
-          <a:bodyPr wrap="square">
-            <a:spAutoFit/>
-          </a:bodyPr>
-          <a:lstStyle/>
-          <a:p>
-            <a:pPr>
-              <a:lnSpc>
-                <a:spcPct val="115000"/>
-              </a:lnSpc>
-            </a:pPr>
-            <a:r>
-              <a:rPr sz="1300">
-                <a:solidFill>
-                  <a:srgbClr val="CBD5E1"/>
-                </a:solidFill>
-                <a:latin typeface="Menlo"/>
-              </a:rPr>
-              <a:t>两连攻击全拦</a:t>
-            </a:r>
-          </a:p>
-        </p:txBody>
-      </p:sp>
-      <p:sp>
-        <p:nvSpPr>
-          <p:cNvPr id="13" name="TextBox 12"/>
-          <p:cNvSpPr txBox="1"/>
-          <p:nvPr/>
-        </p:nvSpPr>
-        <p:spPr>
-          <a:xfrm>
-            <a:off x="10287000" y="6534150"/>
-            <a:ext cx="1619250" cy="266700"/>
-          </a:xfrm>
-          <a:prstGeom prst="rect">
-            <a:avLst/>
-          </a:prstGeom>
-          <a:noFill/>
-        </p:spPr>
-        <p:txBody>
-          <a:bodyPr wrap="square" anchor="ctr">
-            <a:spAutoFit/>
-          </a:bodyPr>
-          <a:lstStyle/>
-          <a:p>
-            <a:pPr algn="r">
-              <a:lnSpc>
-                <a:spcPct val="100000"/>
-              </a:lnSpc>
-            </a:pPr>
-            <a:r>
               <a:rPr sz="900" b="0">
                 <a:solidFill>
                   <a:srgbClr val="94A3B8"/>
@@ -25254,7 +25453,7 @@
       </p:sp>
       <p:sp>
         <p:nvSpPr>
-          <p:cNvPr id="14" name="TextBox 13"/>
+          <p:cNvPr id="13" name="TextBox 12"/>
           <p:cNvSpPr txBox="1"/>
           <p:nvPr/>
         </p:nvSpPr>

--- a/03-课件PPT/讲次版/第3章-4-讲次 3-4 · Sandbox 与执行边界.pptx
+++ b/03-课件PPT/讲次版/第3章-4-讲次 3-4 · Sandbox 与执行边界.pptx
@@ -20347,7 +20347,7 @@
           <a:noFill/>
         </p:spPr>
         <p:txBody>
-          <a:bodyPr wrap="none" anchor="ctr">
+          <a:bodyPr wrap="square" anchor="ctr">
             <a:spAutoFit/>
           </a:bodyPr>
           <a:lstStyle/>
@@ -20358,7 +20358,7 @@
               </a:lnSpc>
             </a:pPr>
             <a:r>
-              <a:rPr sz="900" b="1">
+              <a:rPr sz="1300" b="1">
                 <a:solidFill>
                   <a:srgbClr val="0B1D3A"/>
                 </a:solidFill>
@@ -20478,7 +20478,7 @@
           <a:noFill/>
         </p:spPr>
         <p:txBody>
-          <a:bodyPr wrap="none" anchor="ctr">
+          <a:bodyPr wrap="square" anchor="ctr">
             <a:spAutoFit/>
           </a:bodyPr>
           <a:lstStyle/>
@@ -20489,7 +20489,7 @@
               </a:lnSpc>
             </a:pPr>
             <a:r>
-              <a:rPr sz="1100" b="1">
+              <a:rPr sz="1300" b="1">
                 <a:solidFill>
                   <a:srgbClr val="0B1D3A"/>
                 </a:solidFill>
@@ -20609,7 +20609,7 @@
           <a:noFill/>
         </p:spPr>
         <p:txBody>
-          <a:bodyPr wrap="none" anchor="ctr">
+          <a:bodyPr wrap="square" anchor="ctr">
             <a:spAutoFit/>
           </a:bodyPr>
           <a:lstStyle/>
@@ -20991,7 +20991,7 @@
           <a:noFill/>
         </p:spPr>
         <p:txBody>
-          <a:bodyPr wrap="none" anchor="ctr">
+          <a:bodyPr wrap="square" anchor="ctr">
             <a:spAutoFit/>
           </a:bodyPr>
           <a:lstStyle/>
@@ -21122,7 +21122,7 @@
           <a:noFill/>
         </p:spPr>
         <p:txBody>
-          <a:bodyPr wrap="none" anchor="ctr">
+          <a:bodyPr wrap="square" anchor="ctr">
             <a:spAutoFit/>
           </a:bodyPr>
           <a:lstStyle/>
@@ -21253,7 +21253,7 @@
           <a:noFill/>
         </p:spPr>
         <p:txBody>
-          <a:bodyPr wrap="none" anchor="ctr">
+          <a:bodyPr wrap="square" anchor="ctr">
             <a:spAutoFit/>
           </a:bodyPr>
           <a:lstStyle/>
@@ -21264,7 +21264,7 @@
               </a:lnSpc>
             </a:pPr>
             <a:r>
-              <a:rPr sz="1100" b="1">
+              <a:rPr sz="1300" b="1">
                 <a:solidFill>
                   <a:srgbClr val="0B1D3A"/>
                 </a:solidFill>
@@ -21635,7 +21635,7 @@
           <a:noFill/>
         </p:spPr>
         <p:txBody>
-          <a:bodyPr wrap="none" anchor="ctr">
+          <a:bodyPr wrap="square" anchor="ctr">
             <a:spAutoFit/>
           </a:bodyPr>
           <a:lstStyle/>
@@ -21766,7 +21766,7 @@
           <a:noFill/>
         </p:spPr>
         <p:txBody>
-          <a:bodyPr wrap="none" anchor="ctr">
+          <a:bodyPr wrap="square" anchor="ctr">
             <a:spAutoFit/>
           </a:bodyPr>
           <a:lstStyle/>
@@ -21897,7 +21897,7 @@
           <a:noFill/>
         </p:spPr>
         <p:txBody>
-          <a:bodyPr wrap="none" anchor="ctr">
+          <a:bodyPr wrap="square" anchor="ctr">
             <a:spAutoFit/>
           </a:bodyPr>
           <a:lstStyle/>
